--- a/docs/Slide template.pptx
+++ b/docs/Slide template.pptx
@@ -9,10 +9,15 @@
     <p:sldId id="263" r:id="rId3"/>
     <p:sldId id="257" r:id="rId4"/>
     <p:sldId id="262" r:id="rId5"/>
-    <p:sldId id="258" r:id="rId6"/>
-    <p:sldId id="259" r:id="rId7"/>
-    <p:sldId id="260" r:id="rId8"/>
-    <p:sldId id="261" r:id="rId9"/>
+    <p:sldId id="264" r:id="rId6"/>
+    <p:sldId id="265" r:id="rId7"/>
+    <p:sldId id="266" r:id="rId8"/>
+    <p:sldId id="267" r:id="rId9"/>
+    <p:sldId id="268" r:id="rId10"/>
+    <p:sldId id="269" r:id="rId11"/>
+    <p:sldId id="258" r:id="rId12"/>
+    <p:sldId id="259" r:id="rId13"/>
+    <p:sldId id="261" r:id="rId14"/>
   </p:sldIdLst>
   <p:sldSz cx="12192000" cy="6858000"/>
   <p:notesSz cx="6858000" cy="9144000"/>
@@ -266,7 +271,7 @@
           <a:p>
             <a:fld id="{1593D36A-4129-4868-A654-22E0AC15B4DF}" type="datetimeFigureOut">
               <a:rPr lang="en-US" smtClean="0"/>
-              <a:t>9/10/2023</a:t>
+              <a:t>10/1/2023</a:t>
             </a:fld>
             <a:endParaRPr lang="en-US"/>
           </a:p>
@@ -464,7 +469,7 @@
           <a:p>
             <a:fld id="{1593D36A-4129-4868-A654-22E0AC15B4DF}" type="datetimeFigureOut">
               <a:rPr lang="en-US" smtClean="0"/>
-              <a:t>9/10/2023</a:t>
+              <a:t>10/1/2023</a:t>
             </a:fld>
             <a:endParaRPr lang="en-US"/>
           </a:p>
@@ -672,7 +677,7 @@
           <a:p>
             <a:fld id="{1593D36A-4129-4868-A654-22E0AC15B4DF}" type="datetimeFigureOut">
               <a:rPr lang="en-US" smtClean="0"/>
-              <a:t>9/10/2023</a:t>
+              <a:t>10/1/2023</a:t>
             </a:fld>
             <a:endParaRPr lang="en-US"/>
           </a:p>
@@ -870,7 +875,7 @@
           <a:p>
             <a:fld id="{1593D36A-4129-4868-A654-22E0AC15B4DF}" type="datetimeFigureOut">
               <a:rPr lang="en-US" smtClean="0"/>
-              <a:t>9/10/2023</a:t>
+              <a:t>10/1/2023</a:t>
             </a:fld>
             <a:endParaRPr lang="en-US"/>
           </a:p>
@@ -1145,7 +1150,7 @@
           <a:p>
             <a:fld id="{1593D36A-4129-4868-A654-22E0AC15B4DF}" type="datetimeFigureOut">
               <a:rPr lang="en-US" smtClean="0"/>
-              <a:t>9/10/2023</a:t>
+              <a:t>10/1/2023</a:t>
             </a:fld>
             <a:endParaRPr lang="en-US"/>
           </a:p>
@@ -1410,7 +1415,7 @@
           <a:p>
             <a:fld id="{1593D36A-4129-4868-A654-22E0AC15B4DF}" type="datetimeFigureOut">
               <a:rPr lang="en-US" smtClean="0"/>
-              <a:t>9/10/2023</a:t>
+              <a:t>10/1/2023</a:t>
             </a:fld>
             <a:endParaRPr lang="en-US"/>
           </a:p>
@@ -1822,7 +1827,7 @@
           <a:p>
             <a:fld id="{1593D36A-4129-4868-A654-22E0AC15B4DF}" type="datetimeFigureOut">
               <a:rPr lang="en-US" smtClean="0"/>
-              <a:t>9/10/2023</a:t>
+              <a:t>10/1/2023</a:t>
             </a:fld>
             <a:endParaRPr lang="en-US"/>
           </a:p>
@@ -1963,7 +1968,7 @@
           <a:p>
             <a:fld id="{1593D36A-4129-4868-A654-22E0AC15B4DF}" type="datetimeFigureOut">
               <a:rPr lang="en-US" smtClean="0"/>
-              <a:t>9/10/2023</a:t>
+              <a:t>10/1/2023</a:t>
             </a:fld>
             <a:endParaRPr lang="en-US"/>
           </a:p>
@@ -2076,7 +2081,7 @@
           <a:p>
             <a:fld id="{1593D36A-4129-4868-A654-22E0AC15B4DF}" type="datetimeFigureOut">
               <a:rPr lang="en-US" smtClean="0"/>
-              <a:t>9/10/2023</a:t>
+              <a:t>10/1/2023</a:t>
             </a:fld>
             <a:endParaRPr lang="en-US"/>
           </a:p>
@@ -2387,7 +2392,7 @@
           <a:p>
             <a:fld id="{1593D36A-4129-4868-A654-22E0AC15B4DF}" type="datetimeFigureOut">
               <a:rPr lang="en-US" smtClean="0"/>
-              <a:t>9/10/2023</a:t>
+              <a:t>10/1/2023</a:t>
             </a:fld>
             <a:endParaRPr lang="en-US"/>
           </a:p>
@@ -2675,7 +2680,7 @@
           <a:p>
             <a:fld id="{1593D36A-4129-4868-A654-22E0AC15B4DF}" type="datetimeFigureOut">
               <a:rPr lang="en-US" smtClean="0"/>
-              <a:t>9/10/2023</a:t>
+              <a:t>10/1/2023</a:t>
             </a:fld>
             <a:endParaRPr lang="en-US"/>
           </a:p>
@@ -2916,7 +2921,7 @@
           <a:p>
             <a:fld id="{1593D36A-4129-4868-A654-22E0AC15B4DF}" type="datetimeFigureOut">
               <a:rPr lang="en-US" smtClean="0"/>
-              <a:t>9/10/2023</a:t>
+              <a:t>10/1/2023</a:t>
             </a:fld>
             <a:endParaRPr lang="en-US"/>
           </a:p>
@@ -3357,38 +3362,108 @@
           <a:lstStyle/>
           <a:p>
             <a:r>
-              <a:rPr lang="en-US" sz="4000">
+              <a:rPr lang="en-US" sz="4000" dirty="0">
                 <a:latin typeface="Arial" panose="020B0604020202020204" pitchFamily="34" charset="0"/>
                 <a:cs typeface="Arial" panose="020B0604020202020204" pitchFamily="34" charset="0"/>
               </a:rPr>
               <a:t>TR</a:t>
             </a:r>
             <a:r>
-              <a:rPr lang="vi-VN" sz="4000">
+              <a:rPr lang="vi-VN" sz="4000" dirty="0">
                 <a:latin typeface="Arial" panose="020B0604020202020204" pitchFamily="34" charset="0"/>
                 <a:cs typeface="Arial" panose="020B0604020202020204" pitchFamily="34" charset="0"/>
               </a:rPr>
               <a:t>Ư</a:t>
             </a:r>
             <a:r>
-              <a:rPr lang="en-US" sz="4000">
-                <a:latin typeface="Arial" panose="020B0604020202020204" pitchFamily="34" charset="0"/>
-                <a:cs typeface="Arial" panose="020B0604020202020204" pitchFamily="34" charset="0"/>
-              </a:rPr>
-              <a:t>ỜNG ĐẠI HỌC CNTT</a:t>
+              <a:rPr lang="en-US" sz="4000" dirty="0" err="1">
+                <a:latin typeface="Arial" panose="020B0604020202020204" pitchFamily="34" charset="0"/>
+                <a:cs typeface="Arial" panose="020B0604020202020204" pitchFamily="34" charset="0"/>
+              </a:rPr>
+              <a:t>ỜNG</a:t>
+            </a:r>
+            <a:r>
+              <a:rPr lang="en-US" sz="4000" dirty="0">
+                <a:latin typeface="Arial" panose="020B0604020202020204" pitchFamily="34" charset="0"/>
+                <a:cs typeface="Arial" panose="020B0604020202020204" pitchFamily="34" charset="0"/>
+              </a:rPr>
+              <a:t> </a:t>
+            </a:r>
+            <a:r>
+              <a:rPr lang="en-US" sz="4000" dirty="0" err="1">
+                <a:latin typeface="Arial" panose="020B0604020202020204" pitchFamily="34" charset="0"/>
+                <a:cs typeface="Arial" panose="020B0604020202020204" pitchFamily="34" charset="0"/>
+              </a:rPr>
+              <a:t>ĐẠI</a:t>
+            </a:r>
+            <a:r>
+              <a:rPr lang="en-US" sz="4000" dirty="0">
+                <a:latin typeface="Arial" panose="020B0604020202020204" pitchFamily="34" charset="0"/>
+                <a:cs typeface="Arial" panose="020B0604020202020204" pitchFamily="34" charset="0"/>
+              </a:rPr>
+              <a:t> </a:t>
+            </a:r>
+            <a:r>
+              <a:rPr lang="en-US" sz="4000" dirty="0" err="1">
+                <a:latin typeface="Arial" panose="020B0604020202020204" pitchFamily="34" charset="0"/>
+                <a:cs typeface="Arial" panose="020B0604020202020204" pitchFamily="34" charset="0"/>
+              </a:rPr>
+              <a:t>HỌC</a:t>
+            </a:r>
+            <a:r>
+              <a:rPr lang="en-US" sz="4000" dirty="0">
+                <a:latin typeface="Arial" panose="020B0604020202020204" pitchFamily="34" charset="0"/>
+                <a:cs typeface="Arial" panose="020B0604020202020204" pitchFamily="34" charset="0"/>
+              </a:rPr>
+              <a:t> </a:t>
+            </a:r>
+            <a:r>
+              <a:rPr lang="en-US" sz="4000" dirty="0" err="1">
+                <a:latin typeface="Arial" panose="020B0604020202020204" pitchFamily="34" charset="0"/>
+                <a:cs typeface="Arial" panose="020B0604020202020204" pitchFamily="34" charset="0"/>
+              </a:rPr>
+              <a:t>CNTT</a:t>
             </a:r>
             <a:br>
-              <a:rPr lang="en-US" sz="4000">
+              <a:rPr lang="en-US" sz="4000" dirty="0">
                 <a:latin typeface="Arial" panose="020B0604020202020204" pitchFamily="34" charset="0"/>
                 <a:cs typeface="Arial" panose="020B0604020202020204" pitchFamily="34" charset="0"/>
               </a:rPr>
             </a:br>
             <a:r>
-              <a:rPr lang="en-US" sz="4000">
-                <a:latin typeface="Arial" panose="020B0604020202020204" pitchFamily="34" charset="0"/>
-                <a:cs typeface="Arial" panose="020B0604020202020204" pitchFamily="34" charset="0"/>
-              </a:rPr>
-              <a:t>KHOA …</a:t>
+              <a:rPr lang="en-US" sz="4000" dirty="0">
+                <a:latin typeface="Arial" panose="020B0604020202020204" pitchFamily="34" charset="0"/>
+                <a:cs typeface="Arial" panose="020B0604020202020204" pitchFamily="34" charset="0"/>
+              </a:rPr>
+              <a:t>KHOA </a:t>
+            </a:r>
+            <a:r>
+              <a:rPr lang="en-US" sz="4000" dirty="0" err="1">
+                <a:latin typeface="Arial" panose="020B0604020202020204" pitchFamily="34" charset="0"/>
+                <a:cs typeface="Arial" panose="020B0604020202020204" pitchFamily="34" charset="0"/>
+              </a:rPr>
+              <a:t>CÔNG</a:t>
+            </a:r>
+            <a:r>
+              <a:rPr lang="en-US" sz="4000" dirty="0">
+                <a:latin typeface="Arial" panose="020B0604020202020204" pitchFamily="34" charset="0"/>
+                <a:cs typeface="Arial" panose="020B0604020202020204" pitchFamily="34" charset="0"/>
+              </a:rPr>
+              <a:t> </a:t>
+            </a:r>
+            <a:r>
+              <a:rPr lang="en-US" sz="4000" dirty="0" err="1">
+                <a:latin typeface="Arial" panose="020B0604020202020204" pitchFamily="34" charset="0"/>
+                <a:cs typeface="Arial" panose="020B0604020202020204" pitchFamily="34" charset="0"/>
+              </a:rPr>
+              <a:t>NGHỆ</a:t>
+            </a:r>
+            <a:r>
+              <a:rPr lang="en-US" sz="4000" dirty="0">
+                <a:latin typeface="Arial" panose="020B0604020202020204" pitchFamily="34" charset="0"/>
+                <a:cs typeface="Arial" panose="020B0604020202020204" pitchFamily="34" charset="0"/>
+              </a:rPr>
+              <a:t> THÔNG TIN</a:t>
             </a:r>
           </a:p>
         </p:txBody>
@@ -3411,33 +3486,92 @@
         </p:nvSpPr>
         <p:spPr>
           <a:xfrm>
-            <a:off x="7170819" y="4853318"/>
-            <a:ext cx="4267200" cy="1655762"/>
+            <a:off x="6504710" y="4589207"/>
+            <a:ext cx="4933310" cy="1919873"/>
           </a:xfrm>
         </p:spPr>
         <p:txBody>
-          <a:bodyPr/>
+          <a:bodyPr>
+            <a:normAutofit/>
+          </a:bodyPr>
           <a:lstStyle/>
           <a:p>
             <a:pPr algn="l"/>
             <a:r>
-              <a:rPr lang="en-US"/>
-              <a:t>Nhóm #12:</a:t>
+              <a:rPr lang="en-US" dirty="0" err="1"/>
+              <a:t>Nhóm</a:t>
+            </a:r>
+            <a:r>
+              <a:rPr lang="en-US" dirty="0"/>
+              <a:t> #30:</a:t>
             </a:r>
           </a:p>
           <a:p>
             <a:pPr algn="l"/>
             <a:r>
-              <a:rPr lang="en-US"/>
-              <a:t>	1. Full name</a:t>
+              <a:rPr lang="en-US" dirty="0"/>
+              <a:t>	1. Võ </a:t>
+            </a:r>
+            <a:r>
+              <a:rPr lang="en-US" dirty="0" err="1"/>
+              <a:t>Tấn</a:t>
+            </a:r>
+            <a:r>
+              <a:rPr lang="en-US" dirty="0"/>
+              <a:t> Hoàng</a:t>
             </a:r>
           </a:p>
           <a:p>
             <a:pPr algn="l"/>
             <a:r>
-              <a:rPr lang="en-US"/>
-              <a:t>	2. Full name </a:t>
-            </a:r>
+              <a:rPr lang="en-US" dirty="0"/>
+              <a:t>	2. </a:t>
+            </a:r>
+            <a:r>
+              <a:rPr lang="en-US" dirty="0" err="1"/>
+              <a:t>Nguyễn</a:t>
+            </a:r>
+            <a:r>
+              <a:rPr lang="en-US" dirty="0"/>
+              <a:t> </a:t>
+            </a:r>
+            <a:r>
+              <a:rPr lang="en-US" dirty="0" err="1"/>
+              <a:t>Thị</a:t>
+            </a:r>
+            <a:r>
+              <a:rPr lang="en-US" dirty="0"/>
+              <a:t> Thanh </a:t>
+            </a:r>
+            <a:r>
+              <a:rPr lang="en-US" dirty="0" err="1"/>
+              <a:t>Duyên</a:t>
+            </a:r>
+            <a:endParaRPr lang="en-US" dirty="0"/>
+          </a:p>
+          <a:p>
+            <a:pPr algn="l"/>
+            <a:r>
+              <a:rPr lang="en-US" dirty="0"/>
+              <a:t>	3. </a:t>
+            </a:r>
+            <a:r>
+              <a:rPr lang="en-US" dirty="0" err="1"/>
+              <a:t>Nguyễn</a:t>
+            </a:r>
+            <a:r>
+              <a:rPr lang="en-US" dirty="0"/>
+              <a:t> Xuân </a:t>
+            </a:r>
+            <a:r>
+              <a:rPr lang="en-US" dirty="0" err="1"/>
+              <a:t>Phước</a:t>
+            </a:r>
+            <a:endParaRPr lang="en-US" dirty="0"/>
+          </a:p>
+          <a:p>
+            <a:pPr algn="l"/>
+            <a:endParaRPr lang="en-US" dirty="0"/>
           </a:p>
         </p:txBody>
       </p:sp>
@@ -3634,96 +3768,1371 @@
           </a:lstStyle>
           <a:p>
             <a:r>
-              <a:rPr lang="en-US" sz="3500">
+              <a:rPr lang="en-US" sz="3500" dirty="0" err="1">
                 <a:solidFill>
                   <a:srgbClr val="FF0000"/>
                 </a:solidFill>
                 <a:latin typeface="Arial" panose="020B0604020202020204" pitchFamily="34" charset="0"/>
                 <a:cs typeface="Arial" panose="020B0604020202020204" pitchFamily="34" charset="0"/>
               </a:rPr>
-              <a:t>ỨNG DỤNG … XÂY DỰNG HỆ THỐNG QUẢN LÝ …</a:t>
-            </a:r>
-          </a:p>
-        </p:txBody>
-      </p:sp>
-      <p:sp>
-        <p:nvSpPr>
-          <p:cNvPr id="5" name="TextBox 4">
-            <a:extLst>
-              <a:ext uri="{FF2B5EF4-FFF2-40B4-BE49-F238E27FC236}">
-                <a16:creationId xmlns:a16="http://schemas.microsoft.com/office/drawing/2014/main" id="{A5989062-54BA-00AB-97C4-E86C384BD747}"/>
-              </a:ext>
-            </a:extLst>
-          </p:cNvPr>
-          <p:cNvSpPr txBox="1"/>
+              <a:t>QUẢN</a:t>
+            </a:r>
+            <a:r>
+              <a:rPr lang="en-US" sz="3500" dirty="0">
+                <a:solidFill>
+                  <a:srgbClr val="FF0000"/>
+                </a:solidFill>
+                <a:latin typeface="Arial" panose="020B0604020202020204" pitchFamily="34" charset="0"/>
+                <a:cs typeface="Arial" panose="020B0604020202020204" pitchFamily="34" charset="0"/>
+              </a:rPr>
+              <a:t> LÝ </a:t>
+            </a:r>
+            <a:r>
+              <a:rPr lang="en-US" sz="3500" dirty="0" err="1">
+                <a:solidFill>
+                  <a:srgbClr val="FF0000"/>
+                </a:solidFill>
+                <a:latin typeface="Arial" panose="020B0604020202020204" pitchFamily="34" charset="0"/>
+                <a:cs typeface="Arial" panose="020B0604020202020204" pitchFamily="34" charset="0"/>
+              </a:rPr>
+              <a:t>NGÂN</a:t>
+            </a:r>
+            <a:r>
+              <a:rPr lang="en-US" sz="3500" dirty="0">
+                <a:solidFill>
+                  <a:srgbClr val="FF0000"/>
+                </a:solidFill>
+                <a:latin typeface="Arial" panose="020B0604020202020204" pitchFamily="34" charset="0"/>
+                <a:cs typeface="Arial" panose="020B0604020202020204" pitchFamily="34" charset="0"/>
+              </a:rPr>
+              <a:t> </a:t>
+            </a:r>
+            <a:r>
+              <a:rPr lang="en-US" sz="3500" dirty="0" err="1">
+                <a:solidFill>
+                  <a:srgbClr val="FF0000"/>
+                </a:solidFill>
+                <a:latin typeface="Arial" panose="020B0604020202020204" pitchFamily="34" charset="0"/>
+                <a:cs typeface="Arial" panose="020B0604020202020204" pitchFamily="34" charset="0"/>
+              </a:rPr>
+              <a:t>HÀNG</a:t>
+            </a:r>
+            <a:endParaRPr lang="en-US" sz="3500" dirty="0">
+              <a:solidFill>
+                <a:srgbClr val="FF0000"/>
+              </a:solidFill>
+              <a:latin typeface="Arial" panose="020B0604020202020204" pitchFamily="34" charset="0"/>
+              <a:cs typeface="Arial" panose="020B0604020202020204" pitchFamily="34" charset="0"/>
+            </a:endParaRPr>
+          </a:p>
+        </p:txBody>
+      </p:sp>
+    </p:spTree>
+    <p:extLst>
+      <p:ext uri="{BB962C8B-B14F-4D97-AF65-F5344CB8AC3E}">
+        <p14:creationId xmlns:p14="http://schemas.microsoft.com/office/powerpoint/2010/main" val="1055706708"/>
+      </p:ext>
+    </p:extLst>
+  </p:cSld>
+  <p:clrMapOvr>
+    <a:masterClrMapping/>
+  </p:clrMapOvr>
+</p:sld>
+</file>
+
+<file path=ppt/slides/slide10.xml><?xml version="1.0" encoding="utf-8"?>
+<p:sld xmlns:a="http://schemas.openxmlformats.org/drawingml/2006/main" xmlns:r="http://schemas.openxmlformats.org/officeDocument/2006/relationships" xmlns:p="http://schemas.openxmlformats.org/presentationml/2006/main">
+  <p:cSld>
+    <p:spTree>
+      <p:nvGrpSpPr>
+        <p:cNvPr id="1" name=""/>
+        <p:cNvGrpSpPr/>
+        <p:nvPr/>
+      </p:nvGrpSpPr>
+      <p:grpSpPr>
+        <a:xfrm>
+          <a:off x="0" y="0"/>
+          <a:ext cx="0" cy="0"/>
+          <a:chOff x="0" y="0"/>
+          <a:chExt cx="0" cy="0"/>
+        </a:xfrm>
+      </p:grpSpPr>
+      <p:sp>
+        <p:nvSpPr>
+          <p:cNvPr id="2" name="Title 1">
+            <a:extLst>
+              <a:ext uri="{FF2B5EF4-FFF2-40B4-BE49-F238E27FC236}">
+                <a16:creationId xmlns:a16="http://schemas.microsoft.com/office/drawing/2014/main" id="{2E3EDEA6-8F93-569E-87B8-3B26C6EC7632}"/>
+              </a:ext>
+            </a:extLst>
+          </p:cNvPr>
+          <p:cNvSpPr>
+            <a:spLocks noGrp="1"/>
+          </p:cNvSpPr>
+          <p:nvPr>
+            <p:ph type="title"/>
+          </p:nvPr>
+        </p:nvSpPr>
+        <p:spPr/>
+        <p:txBody>
+          <a:bodyPr/>
+          <a:lstStyle/>
+          <a:p>
+            <a:endParaRPr lang="en-US"/>
+          </a:p>
+        </p:txBody>
+      </p:sp>
+      <p:sp>
+        <p:nvSpPr>
+          <p:cNvPr id="3" name="Content Placeholder 2">
+            <a:extLst>
+              <a:ext uri="{FF2B5EF4-FFF2-40B4-BE49-F238E27FC236}">
+                <a16:creationId xmlns:a16="http://schemas.microsoft.com/office/drawing/2014/main" id="{FA959212-BA3B-13D4-6C9D-5E5D14A19D1C}"/>
+              </a:ext>
+            </a:extLst>
+          </p:cNvPr>
+          <p:cNvSpPr>
+            <a:spLocks noGrp="1"/>
+          </p:cNvSpPr>
+          <p:nvPr>
+            <p:ph idx="1"/>
+          </p:nvPr>
+        </p:nvSpPr>
+        <p:spPr/>
+        <p:txBody>
+          <a:bodyPr/>
+          <a:lstStyle/>
+          <a:p>
+            <a:endParaRPr lang="en-US"/>
+          </a:p>
+        </p:txBody>
+      </p:sp>
+      <p:pic>
+        <p:nvPicPr>
+          <p:cNvPr id="4" name="Picture 3">
+            <a:extLst>
+              <a:ext uri="{FF2B5EF4-FFF2-40B4-BE49-F238E27FC236}">
+                <a16:creationId xmlns:a16="http://schemas.microsoft.com/office/drawing/2014/main" id="{5C283743-FFF3-314D-85AE-F909E6241C86}"/>
+              </a:ext>
+            </a:extLst>
+          </p:cNvPr>
+          <p:cNvPicPr>
+            <a:picLocks noChangeAspect="1"/>
+          </p:cNvPicPr>
           <p:nvPr/>
-        </p:nvSpPr>
+        </p:nvPicPr>
+        <p:blipFill>
+          <a:blip r:embed="rId2"/>
+          <a:stretch>
+            <a:fillRect/>
+          </a:stretch>
+        </p:blipFill>
         <p:spPr>
           <a:xfrm>
-            <a:off x="1219199" y="5273972"/>
-            <a:ext cx="3198248" cy="1107996"/>
+            <a:off x="2486222" y="335629"/>
+            <a:ext cx="7512628" cy="6282184"/>
           </a:xfrm>
           <a:prstGeom prst="rect">
             <a:avLst/>
           </a:prstGeom>
-          <a:solidFill>
-            <a:srgbClr val="FFFF00"/>
-          </a:solidFill>
         </p:spPr>
-        <p:txBody>
-          <a:bodyPr wrap="none" rtlCol="0">
-            <a:spAutoFit/>
-          </a:bodyPr>
-          <a:lstStyle/>
-          <a:p>
-            <a:r>
-              <a:rPr lang="en-US" sz="2200" b="1">
-                <a:solidFill>
-                  <a:srgbClr val="FF0000"/>
-                </a:solidFill>
-              </a:rPr>
-              <a:t>Chú ý: </a:t>
-            </a:r>
-          </a:p>
-          <a:p>
-            <a:pPr marL="285750" indent="-285750">
-              <a:buFont typeface="Arial" panose="020B0604020202020204" pitchFamily="34" charset="0"/>
-              <a:buChar char="•"/>
-            </a:pPr>
-            <a:r>
-              <a:rPr lang="en-US" sz="2200" b="1">
-                <a:solidFill>
-                  <a:srgbClr val="FF0000"/>
-                </a:solidFill>
-              </a:rPr>
-              <a:t>Tùy chỉnh theo sở thích</a:t>
-            </a:r>
-          </a:p>
-          <a:p>
-            <a:pPr marL="285750" indent="-285750">
-              <a:buFont typeface="Arial" panose="020B0604020202020204" pitchFamily="34" charset="0"/>
-              <a:buChar char="•"/>
-            </a:pPr>
-            <a:r>
-              <a:rPr lang="en-US" sz="2200" b="1">
-                <a:solidFill>
-                  <a:srgbClr val="FF0000"/>
-                </a:solidFill>
-              </a:rPr>
-              <a:t>Thiết kế hiệu ứng đẹp</a:t>
-            </a:r>
-            <a:endParaRPr lang="vi-VN" sz="2200" b="1">
-              <a:solidFill>
-                <a:srgbClr val="FF0000"/>
-              </a:solidFill>
-            </a:endParaRPr>
-          </a:p>
-        </p:txBody>
-      </p:sp>
+      </p:pic>
     </p:spTree>
     <p:extLst>
       <p:ext uri="{BB962C8B-B14F-4D97-AF65-F5344CB8AC3E}">
-        <p14:creationId xmlns:p14="http://schemas.microsoft.com/office/powerpoint/2010/main" val="1055706708"/>
+        <p14:creationId xmlns:p14="http://schemas.microsoft.com/office/powerpoint/2010/main" val="3647192926"/>
+      </p:ext>
+    </p:extLst>
+  </p:cSld>
+  <p:clrMapOvr>
+    <a:masterClrMapping/>
+  </p:clrMapOvr>
+</p:sld>
+</file>
+
+<file path=ppt/slides/slide11.xml><?xml version="1.0" encoding="utf-8"?>
+<p:sld xmlns:a="http://schemas.openxmlformats.org/drawingml/2006/main" xmlns:r="http://schemas.openxmlformats.org/officeDocument/2006/relationships" xmlns:p="http://schemas.openxmlformats.org/presentationml/2006/main">
+  <p:cSld>
+    <p:bg>
+      <p:bgPr>
+        <a:solidFill>
+          <a:schemeClr val="bg1"/>
+        </a:solidFill>
+        <a:effectLst/>
+      </p:bgPr>
+    </p:bg>
+    <p:spTree>
+      <p:nvGrpSpPr>
+        <p:cNvPr id="1" name=""/>
+        <p:cNvGrpSpPr/>
+        <p:nvPr/>
+      </p:nvGrpSpPr>
+      <p:grpSpPr>
+        <a:xfrm>
+          <a:off x="0" y="0"/>
+          <a:ext cx="0" cy="0"/>
+          <a:chOff x="0" y="0"/>
+          <a:chExt cx="0" cy="0"/>
+        </a:xfrm>
+      </p:grpSpPr>
+      <p:sp useBgFill="1">
+        <p:nvSpPr>
+          <p:cNvPr id="10" name="Rectangle 9">
+            <a:extLst>
+              <a:ext uri="{FF2B5EF4-FFF2-40B4-BE49-F238E27FC236}">
+                <a16:creationId xmlns:a16="http://schemas.microsoft.com/office/drawing/2014/main" id="{32AEEBC8-9D30-42EF-95F2-386C2653FBF0}"/>
+              </a:ext>
+              <a:ext uri="{C183D7F6-B498-43B3-948B-1728B52AA6E4}">
+                <adec:decorative xmlns:adec="http://schemas.microsoft.com/office/drawing/2017/decorative" val="1"/>
+              </a:ext>
+            </a:extLst>
+          </p:cNvPr>
+          <p:cNvSpPr>
+            <a:spLocks noGrp="1" noRot="1" noChangeAspect="1" noMove="1" noResize="1" noEditPoints="1" noAdjustHandles="1" noChangeArrowheads="1" noChangeShapeType="1" noTextEdit="1"/>
+          </p:cNvSpPr>
+          <p:nvPr>
+            <p:extLst>
+              <p:ext uri="{386F3935-93C4-4BCD-93E2-E3B085C9AB24}">
+                <p16:designElem xmlns:p16="http://schemas.microsoft.com/office/powerpoint/2015/main" val="1"/>
+              </p:ext>
+            </p:extLst>
+          </p:nvPr>
+        </p:nvSpPr>
+        <p:spPr>
+          <a:xfrm>
+            <a:off x="0" y="0"/>
+            <a:ext cx="12192000" cy="6858000"/>
+          </a:xfrm>
+          <a:prstGeom prst="rect">
+            <a:avLst/>
+          </a:prstGeom>
+          <a:ln>
+            <a:noFill/>
+          </a:ln>
+        </p:spPr>
+        <p:style>
+          <a:lnRef idx="2">
+            <a:schemeClr val="accent1">
+              <a:shade val="50000"/>
+            </a:schemeClr>
+          </a:lnRef>
+          <a:fillRef idx="1">
+            <a:schemeClr val="accent1"/>
+          </a:fillRef>
+          <a:effectRef idx="0">
+            <a:schemeClr val="accent1"/>
+          </a:effectRef>
+          <a:fontRef idx="minor">
+            <a:schemeClr val="lt1"/>
+          </a:fontRef>
+        </p:style>
+        <p:txBody>
+          <a:bodyPr rtlCol="0" anchor="ctr"/>
+          <a:lstStyle/>
+          <a:p>
+            <a:pPr algn="ctr"/>
+            <a:endParaRPr lang="en-US"/>
+          </a:p>
+        </p:txBody>
+      </p:sp>
+      <p:sp>
+        <p:nvSpPr>
+          <p:cNvPr id="2" name="Title 1">
+            <a:extLst>
+              <a:ext uri="{FF2B5EF4-FFF2-40B4-BE49-F238E27FC236}">
+                <a16:creationId xmlns:a16="http://schemas.microsoft.com/office/drawing/2014/main" id="{BF9627F3-3CD5-440C-AB2A-D214803D0A55}"/>
+              </a:ext>
+            </a:extLst>
+          </p:cNvPr>
+          <p:cNvSpPr>
+            <a:spLocks noGrp="1"/>
+          </p:cNvSpPr>
+          <p:nvPr>
+            <p:ph type="title"/>
+          </p:nvPr>
+        </p:nvSpPr>
+        <p:spPr>
+          <a:xfrm>
+            <a:off x="630936" y="502920"/>
+            <a:ext cx="3419856" cy="1463040"/>
+          </a:xfrm>
+        </p:spPr>
+        <p:txBody>
+          <a:bodyPr anchor="ctr">
+            <a:normAutofit/>
+          </a:bodyPr>
+          <a:lstStyle/>
+          <a:p>
+            <a:r>
+              <a:rPr lang="en-US" sz="4800" dirty="0"/>
+              <a:t>3. </a:t>
+            </a:r>
+            <a:r>
+              <a:rPr lang="en-US" sz="4800" dirty="0" err="1"/>
+              <a:t>Kiến</a:t>
+            </a:r>
+            <a:r>
+              <a:rPr lang="en-US" sz="4800" dirty="0"/>
+              <a:t> </a:t>
+            </a:r>
+            <a:r>
+              <a:rPr lang="en-US" sz="4800" dirty="0" err="1"/>
+              <a:t>trúc</a:t>
+            </a:r>
+            <a:r>
+              <a:rPr lang="en-US" sz="4800" dirty="0"/>
+              <a:t> </a:t>
+            </a:r>
+            <a:r>
+              <a:rPr lang="en-US" sz="4800" dirty="0" err="1"/>
+              <a:t>hệ</a:t>
+            </a:r>
+            <a:r>
+              <a:rPr lang="en-US" sz="4800" dirty="0"/>
+              <a:t> </a:t>
+            </a:r>
+            <a:r>
+              <a:rPr lang="en-US" sz="4800" dirty="0" err="1"/>
+              <a:t>thống</a:t>
+            </a:r>
+            <a:endParaRPr lang="en-US" sz="4800" dirty="0"/>
+          </a:p>
+        </p:txBody>
+      </p:sp>
+      <p:sp>
+        <p:nvSpPr>
+          <p:cNvPr id="12" name="sketch line">
+            <a:extLst>
+              <a:ext uri="{FF2B5EF4-FFF2-40B4-BE49-F238E27FC236}">
+                <a16:creationId xmlns:a16="http://schemas.microsoft.com/office/drawing/2014/main" id="{2E92FA66-67D7-4CB4-94D3-E643A9AD4757}"/>
+              </a:ext>
+              <a:ext uri="{C183D7F6-B498-43B3-948B-1728B52AA6E4}">
+                <adec:decorative xmlns:adec="http://schemas.microsoft.com/office/drawing/2017/decorative" val="1"/>
+              </a:ext>
+            </a:extLst>
+          </p:cNvPr>
+          <p:cNvSpPr>
+            <a:spLocks noGrp="1" noRot="1" noChangeAspect="1" noMove="1" noResize="1" noEditPoints="1" noAdjustHandles="1" noChangeArrowheads="1" noChangeShapeType="1" noTextEdit="1"/>
+          </p:cNvSpPr>
+          <p:nvPr>
+            <p:extLst>
+              <p:ext uri="{386F3935-93C4-4BCD-93E2-E3B085C9AB24}">
+                <p16:designElem xmlns:p16="http://schemas.microsoft.com/office/powerpoint/2015/main" val="1"/>
+              </p:ext>
+            </p:extLst>
+          </p:nvPr>
+        </p:nvSpPr>
+        <p:spPr>
+          <a:xfrm rot="5400000">
+            <a:off x="3566159" y="1225296"/>
+            <a:ext cx="1554480" cy="18288"/>
+          </a:xfrm>
+          <a:custGeom>
+            <a:avLst/>
+            <a:gdLst>
+              <a:gd name="connsiteX0" fmla="*/ 0 w 1554480"/>
+              <a:gd name="connsiteY0" fmla="*/ 0 h 18288"/>
+              <a:gd name="connsiteX1" fmla="*/ 549250 w 1554480"/>
+              <a:gd name="connsiteY1" fmla="*/ 0 h 18288"/>
+              <a:gd name="connsiteX2" fmla="*/ 1082954 w 1554480"/>
+              <a:gd name="connsiteY2" fmla="*/ 0 h 18288"/>
+              <a:gd name="connsiteX3" fmla="*/ 1554480 w 1554480"/>
+              <a:gd name="connsiteY3" fmla="*/ 0 h 18288"/>
+              <a:gd name="connsiteX4" fmla="*/ 1554480 w 1554480"/>
+              <a:gd name="connsiteY4" fmla="*/ 18288 h 18288"/>
+              <a:gd name="connsiteX5" fmla="*/ 1067410 w 1554480"/>
+              <a:gd name="connsiteY5" fmla="*/ 18288 h 18288"/>
+              <a:gd name="connsiteX6" fmla="*/ 549250 w 1554480"/>
+              <a:gd name="connsiteY6" fmla="*/ 18288 h 18288"/>
+              <a:gd name="connsiteX7" fmla="*/ 0 w 1554480"/>
+              <a:gd name="connsiteY7" fmla="*/ 18288 h 18288"/>
+              <a:gd name="connsiteX8" fmla="*/ 0 w 1554480"/>
+              <a:gd name="connsiteY8" fmla="*/ 0 h 18288"/>
+            </a:gdLst>
+            <a:ahLst/>
+            <a:cxnLst>
+              <a:cxn ang="0">
+                <a:pos x="connsiteX0" y="connsiteY0"/>
+              </a:cxn>
+              <a:cxn ang="0">
+                <a:pos x="connsiteX1" y="connsiteY1"/>
+              </a:cxn>
+              <a:cxn ang="0">
+                <a:pos x="connsiteX2" y="connsiteY2"/>
+              </a:cxn>
+              <a:cxn ang="0">
+                <a:pos x="connsiteX3" y="connsiteY3"/>
+              </a:cxn>
+              <a:cxn ang="0">
+                <a:pos x="connsiteX4" y="connsiteY4"/>
+              </a:cxn>
+              <a:cxn ang="0">
+                <a:pos x="connsiteX5" y="connsiteY5"/>
+              </a:cxn>
+              <a:cxn ang="0">
+                <a:pos x="connsiteX6" y="connsiteY6"/>
+              </a:cxn>
+              <a:cxn ang="0">
+                <a:pos x="connsiteX7" y="connsiteY7"/>
+              </a:cxn>
+              <a:cxn ang="0">
+                <a:pos x="connsiteX8" y="connsiteY8"/>
+              </a:cxn>
+            </a:cxnLst>
+            <a:rect l="l" t="t" r="r" b="b"/>
+            <a:pathLst>
+              <a:path w="1554480" h="18288" fill="none" extrusionOk="0">
+                <a:moveTo>
+                  <a:pt x="0" y="0"/>
+                </a:moveTo>
+                <a:cubicBezTo>
+                  <a:pt x="114141" y="-19864"/>
+                  <a:pt x="345055" y="-1657"/>
+                  <a:pt x="549250" y="0"/>
+                </a:cubicBezTo>
+                <a:cubicBezTo>
+                  <a:pt x="753445" y="1657"/>
+                  <a:pt x="862292" y="-5674"/>
+                  <a:pt x="1082954" y="0"/>
+                </a:cubicBezTo>
+                <a:cubicBezTo>
+                  <a:pt x="1303616" y="5674"/>
+                  <a:pt x="1363530" y="4537"/>
+                  <a:pt x="1554480" y="0"/>
+                </a:cubicBezTo>
+                <a:cubicBezTo>
+                  <a:pt x="1554963" y="7176"/>
+                  <a:pt x="1553909" y="13682"/>
+                  <a:pt x="1554480" y="18288"/>
+                </a:cubicBezTo>
+                <a:cubicBezTo>
+                  <a:pt x="1338847" y="6127"/>
+                  <a:pt x="1215066" y="37851"/>
+                  <a:pt x="1067410" y="18288"/>
+                </a:cubicBezTo>
+                <a:cubicBezTo>
+                  <a:pt x="919754" y="-1275"/>
+                  <a:pt x="800465" y="3080"/>
+                  <a:pt x="549250" y="18288"/>
+                </a:cubicBezTo>
+                <a:cubicBezTo>
+                  <a:pt x="298035" y="33496"/>
+                  <a:pt x="158868" y="22769"/>
+                  <a:pt x="0" y="18288"/>
+                </a:cubicBezTo>
+                <a:cubicBezTo>
+                  <a:pt x="-655" y="13237"/>
+                  <a:pt x="709" y="4645"/>
+                  <a:pt x="0" y="0"/>
+                </a:cubicBezTo>
+                <a:close/>
+              </a:path>
+              <a:path w="1554480" h="18288" stroke="0" extrusionOk="0">
+                <a:moveTo>
+                  <a:pt x="0" y="0"/>
+                </a:moveTo>
+                <a:cubicBezTo>
+                  <a:pt x="249941" y="-58"/>
+                  <a:pt x="367334" y="23448"/>
+                  <a:pt x="502615" y="0"/>
+                </a:cubicBezTo>
+                <a:cubicBezTo>
+                  <a:pt x="637897" y="-23448"/>
+                  <a:pt x="813653" y="-20418"/>
+                  <a:pt x="974141" y="0"/>
+                </a:cubicBezTo>
+                <a:cubicBezTo>
+                  <a:pt x="1134629" y="20418"/>
+                  <a:pt x="1268772" y="6288"/>
+                  <a:pt x="1554480" y="0"/>
+                </a:cubicBezTo>
+                <a:cubicBezTo>
+                  <a:pt x="1554917" y="7222"/>
+                  <a:pt x="1555359" y="13299"/>
+                  <a:pt x="1554480" y="18288"/>
+                </a:cubicBezTo>
+                <a:cubicBezTo>
+                  <a:pt x="1336087" y="12172"/>
+                  <a:pt x="1310024" y="19759"/>
+                  <a:pt x="1067410" y="18288"/>
+                </a:cubicBezTo>
+                <a:cubicBezTo>
+                  <a:pt x="824796" y="16818"/>
+                  <a:pt x="787902" y="34647"/>
+                  <a:pt x="518160" y="18288"/>
+                </a:cubicBezTo>
+                <a:cubicBezTo>
+                  <a:pt x="248418" y="1930"/>
+                  <a:pt x="133160" y="9205"/>
+                  <a:pt x="0" y="18288"/>
+                </a:cubicBezTo>
+                <a:cubicBezTo>
+                  <a:pt x="-643" y="9451"/>
+                  <a:pt x="-340" y="7114"/>
+                  <a:pt x="0" y="0"/>
+                </a:cubicBezTo>
+                <a:close/>
+              </a:path>
+            </a:pathLst>
+          </a:custGeom>
+          <a:solidFill>
+            <a:schemeClr val="accent2"/>
+          </a:solidFill>
+          <a:ln w="41275" cap="rnd">
+            <a:solidFill>
+              <a:schemeClr val="accent2"/>
+            </a:solidFill>
+            <a:round/>
+            <a:extLst>
+              <a:ext uri="{C807C97D-BFC1-408E-A445-0C87EB9F89A2}">
+                <ask:lineSketchStyleProps xmlns:ask="http://schemas.microsoft.com/office/drawing/2018/sketchyshapes" sd="1219033472">
+                  <a:prstGeom prst="rect">
+                    <a:avLst/>
+                  </a:prstGeom>
+                  <ask:type>
+                    <ask:lineSketchFreehand/>
+                  </ask:type>
+                </ask:lineSketchStyleProps>
+              </a:ext>
+            </a:extLst>
+          </a:ln>
+        </p:spPr>
+        <p:style>
+          <a:lnRef idx="2">
+            <a:schemeClr val="accent1">
+              <a:shade val="50000"/>
+            </a:schemeClr>
+          </a:lnRef>
+          <a:fillRef idx="1">
+            <a:schemeClr val="accent1"/>
+          </a:fillRef>
+          <a:effectRef idx="0">
+            <a:schemeClr val="accent1"/>
+          </a:effectRef>
+          <a:fontRef idx="minor">
+            <a:schemeClr val="lt1"/>
+          </a:fontRef>
+        </p:style>
+        <p:txBody>
+          <a:bodyPr rtlCol="0" anchor="ctr"/>
+          <a:lstStyle/>
+          <a:p>
+            <a:pPr algn="ctr"/>
+            <a:endParaRPr lang="en-US"/>
+          </a:p>
+        </p:txBody>
+      </p:sp>
+      <p:sp>
+        <p:nvSpPr>
+          <p:cNvPr id="3" name="Content Placeholder 2">
+            <a:extLst>
+              <a:ext uri="{FF2B5EF4-FFF2-40B4-BE49-F238E27FC236}">
+                <a16:creationId xmlns:a16="http://schemas.microsoft.com/office/drawing/2014/main" id="{567648B8-2155-468C-B7F8-D51EB73EAF45}"/>
+              </a:ext>
+            </a:extLst>
+          </p:cNvPr>
+          <p:cNvSpPr>
+            <a:spLocks noGrp="1"/>
+          </p:cNvSpPr>
+          <p:nvPr>
+            <p:ph idx="1"/>
+          </p:nvPr>
+        </p:nvSpPr>
+        <p:spPr>
+          <a:xfrm>
+            <a:off x="4654295" y="502920"/>
+            <a:ext cx="6894576" cy="1463040"/>
+          </a:xfrm>
+        </p:spPr>
+        <p:txBody>
+          <a:bodyPr anchor="ctr">
+            <a:normAutofit/>
+          </a:bodyPr>
+          <a:lstStyle/>
+          <a:p>
+            <a:r>
+              <a:rPr lang="en-US" sz="1700" dirty="0" err="1"/>
+              <a:t>Sử</a:t>
+            </a:r>
+            <a:r>
+              <a:rPr lang="en-US" sz="1700" dirty="0"/>
+              <a:t> </a:t>
+            </a:r>
+            <a:r>
+              <a:rPr lang="en-US" sz="1700" dirty="0" err="1"/>
+              <a:t>dụng</a:t>
+            </a:r>
+            <a:r>
+              <a:rPr lang="en-US" sz="1700" dirty="0"/>
+              <a:t> MySQL </a:t>
+            </a:r>
+            <a:r>
+              <a:rPr lang="en-US" sz="1700" dirty="0" err="1"/>
+              <a:t>làm</a:t>
+            </a:r>
+            <a:r>
+              <a:rPr lang="en-US" sz="1700" dirty="0"/>
+              <a:t> DB.</a:t>
+            </a:r>
+          </a:p>
+          <a:p>
+            <a:r>
+              <a:rPr lang="en-US" sz="1700" dirty="0" err="1"/>
+              <a:t>Sử</a:t>
+            </a:r>
+            <a:r>
+              <a:rPr lang="en-US" sz="1700" dirty="0"/>
+              <a:t> </a:t>
+            </a:r>
+            <a:r>
+              <a:rPr lang="en-US" sz="1700" dirty="0" err="1"/>
+              <a:t>dụng</a:t>
+            </a:r>
+            <a:r>
+              <a:rPr lang="en-US" sz="1700" dirty="0"/>
+              <a:t> </a:t>
+            </a:r>
+            <a:r>
+              <a:rPr lang="en-US" sz="1700" dirty="0" err="1"/>
+              <a:t>mysql.connector</a:t>
+            </a:r>
+            <a:r>
+              <a:rPr lang="en-US" sz="1700" dirty="0"/>
+              <a:t> </a:t>
+            </a:r>
+            <a:r>
+              <a:rPr lang="en-US" sz="1700" dirty="0" err="1"/>
+              <a:t>hỗ</a:t>
+            </a:r>
+            <a:r>
+              <a:rPr lang="en-US" sz="1700" dirty="0"/>
+              <a:t> </a:t>
+            </a:r>
+            <a:r>
+              <a:rPr lang="en-US" sz="1700" dirty="0" err="1"/>
+              <a:t>trợ</a:t>
+            </a:r>
+            <a:r>
+              <a:rPr lang="en-US" sz="1700" dirty="0"/>
+              <a:t> </a:t>
+            </a:r>
+            <a:r>
+              <a:rPr lang="en-US" sz="1700" dirty="0" err="1"/>
+              <a:t>kết</a:t>
+            </a:r>
+            <a:r>
+              <a:rPr lang="en-US" sz="1700" dirty="0"/>
+              <a:t> </a:t>
+            </a:r>
+            <a:r>
+              <a:rPr lang="en-US" sz="1700" dirty="0" err="1"/>
+              <a:t>nối</a:t>
+            </a:r>
+            <a:r>
+              <a:rPr lang="en-US" sz="1700" dirty="0"/>
+              <a:t> </a:t>
+            </a:r>
+            <a:r>
+              <a:rPr lang="en-US" sz="1700" dirty="0" err="1"/>
+              <a:t>dữ</a:t>
+            </a:r>
+            <a:r>
+              <a:rPr lang="en-US" sz="1700" dirty="0"/>
+              <a:t> </a:t>
+            </a:r>
+            <a:r>
+              <a:rPr lang="en-US" sz="1700" dirty="0" err="1"/>
+              <a:t>liệu</a:t>
+            </a:r>
+            <a:r>
+              <a:rPr lang="en-US" sz="1700" dirty="0"/>
+              <a:t> </a:t>
+            </a:r>
+            <a:r>
+              <a:rPr lang="en-US" sz="1700" dirty="0" err="1"/>
+              <a:t>cho</a:t>
+            </a:r>
+            <a:r>
+              <a:rPr lang="en-US" sz="1700" dirty="0"/>
+              <a:t> </a:t>
+            </a:r>
+            <a:r>
+              <a:rPr lang="en-US" sz="1700" dirty="0" err="1"/>
+              <a:t>dự</a:t>
+            </a:r>
+            <a:r>
+              <a:rPr lang="en-US" sz="1700" dirty="0"/>
+              <a:t> </a:t>
+            </a:r>
+            <a:r>
+              <a:rPr lang="en-US" sz="1700" dirty="0" err="1"/>
+              <a:t>án</a:t>
+            </a:r>
+            <a:r>
+              <a:rPr lang="en-US" sz="1700" dirty="0"/>
+              <a:t>.</a:t>
+            </a:r>
+          </a:p>
+          <a:p>
+            <a:r>
+              <a:rPr lang="en-US" sz="1700" dirty="0" err="1"/>
+              <a:t>Sử</a:t>
+            </a:r>
+            <a:r>
+              <a:rPr lang="en-US" sz="1700" dirty="0"/>
+              <a:t> </a:t>
+            </a:r>
+            <a:r>
+              <a:rPr lang="en-US" sz="1700" dirty="0" err="1"/>
+              <a:t>dụng</a:t>
+            </a:r>
+            <a:r>
+              <a:rPr lang="en-US" sz="1700" dirty="0"/>
+              <a:t> </a:t>
+            </a:r>
+            <a:r>
+              <a:rPr lang="en-US" sz="1700" dirty="0" err="1"/>
+              <a:t>PyQt</a:t>
+            </a:r>
+            <a:r>
+              <a:rPr lang="en-US" sz="1700" dirty="0"/>
+              <a:t> </a:t>
+            </a:r>
+            <a:r>
+              <a:rPr lang="en-US" sz="1700" dirty="0" err="1"/>
+              <a:t>để</a:t>
+            </a:r>
+            <a:r>
+              <a:rPr lang="en-US" sz="1700" dirty="0"/>
+              <a:t> </a:t>
+            </a:r>
+            <a:r>
+              <a:rPr lang="en-US" sz="1700" dirty="0" err="1"/>
+              <a:t>thiết</a:t>
+            </a:r>
+            <a:r>
+              <a:rPr lang="en-US" sz="1700" dirty="0"/>
+              <a:t> </a:t>
+            </a:r>
+            <a:r>
+              <a:rPr lang="en-US" sz="1700" dirty="0" err="1"/>
+              <a:t>kế</a:t>
+            </a:r>
+            <a:r>
+              <a:rPr lang="en-US" sz="1700" dirty="0"/>
+              <a:t> UI.</a:t>
+            </a:r>
+          </a:p>
+          <a:p>
+            <a:r>
+              <a:rPr lang="en-US" sz="1700" dirty="0" err="1"/>
+              <a:t>Mô</a:t>
+            </a:r>
+            <a:r>
+              <a:rPr lang="en-US" sz="1700" dirty="0"/>
+              <a:t> </a:t>
+            </a:r>
+            <a:r>
+              <a:rPr lang="en-US" sz="1700" dirty="0" err="1"/>
+              <a:t>hình</a:t>
+            </a:r>
+            <a:r>
+              <a:rPr lang="en-US" sz="1700" dirty="0"/>
+              <a:t> </a:t>
+            </a:r>
+            <a:r>
+              <a:rPr lang="en-US" sz="1700" dirty="0" err="1"/>
+              <a:t>hệ</a:t>
+            </a:r>
+            <a:r>
+              <a:rPr lang="en-US" sz="1700" dirty="0"/>
+              <a:t> </a:t>
+            </a:r>
+            <a:r>
+              <a:rPr lang="en-US" sz="1700" dirty="0" err="1"/>
+              <a:t>thống</a:t>
+            </a:r>
+            <a:r>
+              <a:rPr lang="en-US" sz="1700" dirty="0"/>
+              <a:t>:</a:t>
+            </a:r>
+          </a:p>
+          <a:p>
+            <a:pPr marL="0" indent="0">
+              <a:buNone/>
+            </a:pPr>
+            <a:endParaRPr lang="en-US" sz="1700" dirty="0"/>
+          </a:p>
+          <a:p>
+            <a:pPr marL="0" indent="0">
+              <a:buNone/>
+            </a:pPr>
+            <a:endParaRPr lang="en-US" sz="1700" dirty="0"/>
+          </a:p>
+        </p:txBody>
+      </p:sp>
+      <p:pic>
+        <p:nvPicPr>
+          <p:cNvPr id="5" name="Picture 4" descr="A diagram of a computer program&#10;&#10;Description automatically generated">
+            <a:extLst>
+              <a:ext uri="{FF2B5EF4-FFF2-40B4-BE49-F238E27FC236}">
+                <a16:creationId xmlns:a16="http://schemas.microsoft.com/office/drawing/2014/main" id="{F2C964F6-666F-E4D0-3E45-41F0FCA12CD3}"/>
+              </a:ext>
+            </a:extLst>
+          </p:cNvPr>
+          <p:cNvPicPr>
+            <a:picLocks noChangeAspect="1"/>
+          </p:cNvPicPr>
+          <p:nvPr/>
+        </p:nvPicPr>
+        <p:blipFill>
+          <a:blip r:embed="rId2"/>
+          <a:stretch>
+            <a:fillRect/>
+          </a:stretch>
+        </p:blipFill>
+        <p:spPr>
+          <a:xfrm>
+            <a:off x="630936" y="2851280"/>
+            <a:ext cx="10917936" cy="2838664"/>
+          </a:xfrm>
+          <a:prstGeom prst="rect">
+            <a:avLst/>
+          </a:prstGeom>
+        </p:spPr>
+      </p:pic>
+    </p:spTree>
+    <p:extLst>
+      <p:ext uri="{BB962C8B-B14F-4D97-AF65-F5344CB8AC3E}">
+        <p14:creationId xmlns:p14="http://schemas.microsoft.com/office/powerpoint/2010/main" val="2336320286"/>
+      </p:ext>
+    </p:extLst>
+  </p:cSld>
+  <p:clrMapOvr>
+    <a:masterClrMapping/>
+  </p:clrMapOvr>
+</p:sld>
+</file>
+
+<file path=ppt/slides/slide12.xml><?xml version="1.0" encoding="utf-8"?>
+<p:sld xmlns:a="http://schemas.openxmlformats.org/drawingml/2006/main" xmlns:r="http://schemas.openxmlformats.org/officeDocument/2006/relationships" xmlns:p="http://schemas.openxmlformats.org/presentationml/2006/main">
+  <p:cSld>
+    <p:spTree>
+      <p:nvGrpSpPr>
+        <p:cNvPr id="1" name=""/>
+        <p:cNvGrpSpPr/>
+        <p:nvPr/>
+      </p:nvGrpSpPr>
+      <p:grpSpPr>
+        <a:xfrm>
+          <a:off x="0" y="0"/>
+          <a:ext cx="0" cy="0"/>
+          <a:chOff x="0" y="0"/>
+          <a:chExt cx="0" cy="0"/>
+        </a:xfrm>
+      </p:grpSpPr>
+      <p:sp>
+        <p:nvSpPr>
+          <p:cNvPr id="2" name="Title 1">
+            <a:extLst>
+              <a:ext uri="{FF2B5EF4-FFF2-40B4-BE49-F238E27FC236}">
+                <a16:creationId xmlns:a16="http://schemas.microsoft.com/office/drawing/2014/main" id="{82A16F7C-5726-4E4B-AC89-372198712DD1}"/>
+              </a:ext>
+            </a:extLst>
+          </p:cNvPr>
+          <p:cNvSpPr>
+            <a:spLocks noGrp="1"/>
+          </p:cNvSpPr>
+          <p:nvPr>
+            <p:ph type="title"/>
+          </p:nvPr>
+        </p:nvSpPr>
+        <p:spPr/>
+        <p:txBody>
+          <a:bodyPr/>
+          <a:lstStyle/>
+          <a:p>
+            <a:r>
+              <a:rPr lang="en-US" dirty="0"/>
+              <a:t>4. </a:t>
+            </a:r>
+            <a:r>
+              <a:rPr lang="en-US" dirty="0" err="1"/>
+              <a:t>Kết</a:t>
+            </a:r>
+            <a:r>
+              <a:rPr lang="en-US" dirty="0"/>
+              <a:t> </a:t>
+            </a:r>
+            <a:r>
+              <a:rPr lang="en-US" dirty="0" err="1"/>
+              <a:t>quả</a:t>
+            </a:r>
+            <a:endParaRPr lang="en-US" dirty="0"/>
+          </a:p>
+        </p:txBody>
+      </p:sp>
+      <p:sp>
+        <p:nvSpPr>
+          <p:cNvPr id="3" name="Content Placeholder 2">
+            <a:extLst>
+              <a:ext uri="{FF2B5EF4-FFF2-40B4-BE49-F238E27FC236}">
+                <a16:creationId xmlns:a16="http://schemas.microsoft.com/office/drawing/2014/main" id="{07BCFCFE-AF90-4383-A48A-381AEDAC8005}"/>
+              </a:ext>
+            </a:extLst>
+          </p:cNvPr>
+          <p:cNvSpPr>
+            <a:spLocks noGrp="1"/>
+          </p:cNvSpPr>
+          <p:nvPr>
+            <p:ph idx="1"/>
+          </p:nvPr>
+        </p:nvSpPr>
+        <p:spPr/>
+        <p:txBody>
+          <a:bodyPr/>
+          <a:lstStyle/>
+          <a:p>
+            <a:r>
+              <a:rPr lang="en-US" dirty="0" err="1"/>
+              <a:t>Phần</a:t>
+            </a:r>
+            <a:r>
+              <a:rPr lang="en-US" dirty="0"/>
+              <a:t> </a:t>
+            </a:r>
+            <a:r>
+              <a:rPr lang="en-US" dirty="0" err="1"/>
+              <a:t>mềm</a:t>
+            </a:r>
+            <a:r>
+              <a:rPr lang="en-US" dirty="0"/>
+              <a:t> </a:t>
+            </a:r>
+            <a:r>
+              <a:rPr lang="en-US" dirty="0" err="1"/>
+              <a:t>quản</a:t>
+            </a:r>
+            <a:r>
+              <a:rPr lang="en-US" dirty="0"/>
+              <a:t> </a:t>
+            </a:r>
+            <a:r>
+              <a:rPr lang="en-US" dirty="0" err="1"/>
+              <a:t>lý</a:t>
+            </a:r>
+            <a:r>
+              <a:rPr lang="en-US" dirty="0"/>
+              <a:t> </a:t>
+            </a:r>
+            <a:r>
+              <a:rPr lang="en-US" dirty="0" err="1"/>
+              <a:t>ngân</a:t>
+            </a:r>
+            <a:r>
+              <a:rPr lang="en-US" dirty="0"/>
+              <a:t> </a:t>
+            </a:r>
+            <a:r>
+              <a:rPr lang="en-US" dirty="0" err="1"/>
+              <a:t>hàng</a:t>
+            </a:r>
+            <a:r>
+              <a:rPr lang="en-US" dirty="0"/>
+              <a:t> </a:t>
+            </a:r>
+            <a:r>
+              <a:rPr lang="en-US" dirty="0" err="1"/>
+              <a:t>với</a:t>
+            </a:r>
+            <a:r>
+              <a:rPr lang="en-US" dirty="0"/>
+              <a:t> </a:t>
+            </a:r>
+            <a:r>
+              <a:rPr lang="en-US" dirty="0" err="1"/>
+              <a:t>các</a:t>
+            </a:r>
+            <a:r>
+              <a:rPr lang="en-US" dirty="0"/>
+              <a:t> </a:t>
+            </a:r>
+            <a:r>
+              <a:rPr lang="en-US" dirty="0" err="1"/>
+              <a:t>chức</a:t>
+            </a:r>
+            <a:r>
+              <a:rPr lang="en-US" dirty="0"/>
+              <a:t> </a:t>
+            </a:r>
+            <a:r>
+              <a:rPr lang="en-US" dirty="0" err="1"/>
+              <a:t>năng</a:t>
+            </a:r>
+            <a:r>
+              <a:rPr lang="en-US" dirty="0"/>
+              <a:t> </a:t>
+            </a:r>
+            <a:r>
+              <a:rPr lang="en-US" dirty="0" err="1"/>
+              <a:t>cơ</a:t>
+            </a:r>
+            <a:r>
+              <a:rPr lang="en-US" dirty="0"/>
+              <a:t> </a:t>
+            </a:r>
+            <a:r>
+              <a:rPr lang="en-US" dirty="0" err="1"/>
+              <a:t>bản</a:t>
+            </a:r>
+            <a:r>
+              <a:rPr lang="en-US" dirty="0"/>
+              <a:t>:</a:t>
+            </a:r>
+          </a:p>
+          <a:p>
+            <a:pPr lvl="1"/>
+            <a:r>
+              <a:rPr lang="en-US" dirty="0" err="1"/>
+              <a:t>Quản</a:t>
+            </a:r>
+            <a:r>
+              <a:rPr lang="en-US" dirty="0"/>
+              <a:t> </a:t>
+            </a:r>
+            <a:r>
+              <a:rPr lang="en-US" dirty="0" err="1"/>
+              <a:t>lý</a:t>
+            </a:r>
+            <a:r>
+              <a:rPr lang="en-US" dirty="0"/>
+              <a:t> </a:t>
+            </a:r>
+            <a:r>
+              <a:rPr lang="en-US" dirty="0" err="1"/>
+              <a:t>nhân</a:t>
+            </a:r>
+            <a:r>
+              <a:rPr lang="en-US" dirty="0"/>
+              <a:t> </a:t>
+            </a:r>
+            <a:r>
+              <a:rPr lang="en-US" dirty="0" err="1"/>
+              <a:t>viên</a:t>
+            </a:r>
+            <a:r>
+              <a:rPr lang="en-US" dirty="0"/>
+              <a:t> (</a:t>
+            </a:r>
+            <a:r>
+              <a:rPr lang="en-US" dirty="0" err="1"/>
+              <a:t>Thêm</a:t>
+            </a:r>
+            <a:r>
+              <a:rPr lang="en-US" dirty="0"/>
+              <a:t>, </a:t>
+            </a:r>
+            <a:r>
+              <a:rPr lang="en-US" dirty="0" err="1"/>
+              <a:t>Xóa</a:t>
+            </a:r>
+            <a:r>
+              <a:rPr lang="en-US" dirty="0"/>
+              <a:t>, </a:t>
+            </a:r>
+            <a:r>
+              <a:rPr lang="en-US" dirty="0" err="1"/>
+              <a:t>Sửa</a:t>
+            </a:r>
+            <a:r>
+              <a:rPr lang="en-US" dirty="0"/>
+              <a:t>)</a:t>
+            </a:r>
+          </a:p>
+          <a:p>
+            <a:pPr lvl="1"/>
+            <a:r>
+              <a:rPr lang="en-US" dirty="0" err="1"/>
+              <a:t>Quản</a:t>
+            </a:r>
+            <a:r>
+              <a:rPr lang="en-US" dirty="0"/>
+              <a:t> </a:t>
+            </a:r>
+            <a:r>
+              <a:rPr lang="en-US" dirty="0" err="1"/>
+              <a:t>lý</a:t>
+            </a:r>
+            <a:r>
+              <a:rPr lang="en-US" dirty="0"/>
+              <a:t> </a:t>
+            </a:r>
+            <a:r>
+              <a:rPr lang="en-US" dirty="0" err="1"/>
+              <a:t>khách</a:t>
+            </a:r>
+            <a:r>
+              <a:rPr lang="en-US" dirty="0"/>
+              <a:t> </a:t>
+            </a:r>
+            <a:r>
+              <a:rPr lang="en-US" dirty="0" err="1"/>
+              <a:t>hàng</a:t>
+            </a:r>
+            <a:r>
+              <a:rPr lang="en-US" dirty="0"/>
+              <a:t> (</a:t>
+            </a:r>
+            <a:r>
+              <a:rPr lang="en-US" dirty="0" err="1"/>
+              <a:t>Thêm</a:t>
+            </a:r>
+            <a:r>
+              <a:rPr lang="en-US" dirty="0"/>
+              <a:t>, </a:t>
+            </a:r>
+            <a:r>
+              <a:rPr lang="en-US" dirty="0" err="1"/>
+              <a:t>Xóa</a:t>
+            </a:r>
+            <a:r>
+              <a:rPr lang="en-US" dirty="0"/>
+              <a:t>, </a:t>
+            </a:r>
+            <a:r>
+              <a:rPr lang="en-US" dirty="0" err="1"/>
+              <a:t>Sửa</a:t>
+            </a:r>
+            <a:r>
+              <a:rPr lang="en-US" dirty="0"/>
+              <a:t>)</a:t>
+            </a:r>
+          </a:p>
+          <a:p>
+            <a:pPr lvl="1"/>
+            <a:r>
+              <a:rPr lang="en-US" dirty="0" err="1"/>
+              <a:t>Quản</a:t>
+            </a:r>
+            <a:r>
+              <a:rPr lang="en-US" dirty="0"/>
+              <a:t> </a:t>
+            </a:r>
+            <a:r>
+              <a:rPr lang="en-US" dirty="0" err="1"/>
+              <a:t>lý</a:t>
+            </a:r>
+            <a:r>
+              <a:rPr lang="en-US" dirty="0"/>
+              <a:t> </a:t>
+            </a:r>
+            <a:r>
+              <a:rPr lang="en-US" dirty="0" err="1"/>
+              <a:t>tài</a:t>
+            </a:r>
+            <a:r>
+              <a:rPr lang="en-US" dirty="0"/>
+              <a:t> </a:t>
+            </a:r>
+            <a:r>
+              <a:rPr lang="en-US" dirty="0" err="1"/>
+              <a:t>khoản</a:t>
+            </a:r>
+            <a:r>
+              <a:rPr lang="en-US" dirty="0"/>
+              <a:t> </a:t>
+            </a:r>
+            <a:r>
+              <a:rPr lang="en-US" dirty="0" err="1"/>
+              <a:t>khách</a:t>
+            </a:r>
+            <a:r>
+              <a:rPr lang="en-US" dirty="0"/>
+              <a:t> </a:t>
+            </a:r>
+            <a:r>
+              <a:rPr lang="en-US" dirty="0" err="1"/>
+              <a:t>hàng</a:t>
+            </a:r>
+            <a:endParaRPr lang="en-US" dirty="0"/>
+          </a:p>
+          <a:p>
+            <a:pPr lvl="1"/>
+            <a:r>
+              <a:rPr lang="en-US" dirty="0" err="1"/>
+              <a:t>Quản</a:t>
+            </a:r>
+            <a:r>
+              <a:rPr lang="en-US" dirty="0"/>
+              <a:t> </a:t>
+            </a:r>
+            <a:r>
+              <a:rPr lang="en-US" dirty="0" err="1"/>
+              <a:t>lý</a:t>
+            </a:r>
+            <a:r>
+              <a:rPr lang="en-US" dirty="0"/>
+              <a:t> </a:t>
+            </a:r>
+            <a:r>
+              <a:rPr lang="en-US" dirty="0" err="1"/>
+              <a:t>giao</a:t>
+            </a:r>
+            <a:r>
+              <a:rPr lang="en-US" dirty="0"/>
+              <a:t> </a:t>
+            </a:r>
+            <a:r>
+              <a:rPr lang="en-US" dirty="0" err="1"/>
+              <a:t>dịch</a:t>
+            </a:r>
+            <a:r>
+              <a:rPr lang="en-US" dirty="0"/>
+              <a:t> </a:t>
+            </a:r>
+            <a:r>
+              <a:rPr lang="en-US" dirty="0" err="1"/>
+              <a:t>khách</a:t>
+            </a:r>
+            <a:r>
+              <a:rPr lang="en-US" dirty="0"/>
+              <a:t> </a:t>
+            </a:r>
+            <a:r>
+              <a:rPr lang="en-US" dirty="0" err="1"/>
+              <a:t>hàng</a:t>
+            </a:r>
+            <a:r>
+              <a:rPr lang="en-US" dirty="0"/>
+              <a:t>(Vay, </a:t>
+            </a:r>
+            <a:r>
+              <a:rPr lang="en-US" dirty="0" err="1"/>
+              <a:t>Gửi</a:t>
+            </a:r>
+            <a:r>
+              <a:rPr lang="en-US" dirty="0"/>
+              <a:t> </a:t>
+            </a:r>
+            <a:r>
+              <a:rPr lang="en-US" dirty="0" err="1"/>
+              <a:t>tiền</a:t>
+            </a:r>
+            <a:r>
+              <a:rPr lang="en-US" dirty="0"/>
+              <a:t>, </a:t>
+            </a:r>
+            <a:r>
+              <a:rPr lang="en-US" dirty="0" err="1"/>
+              <a:t>Tín</a:t>
+            </a:r>
+            <a:r>
+              <a:rPr lang="en-US" dirty="0"/>
+              <a:t> </a:t>
+            </a:r>
+            <a:r>
+              <a:rPr lang="en-US" dirty="0" err="1"/>
+              <a:t>dụng</a:t>
+            </a:r>
+            <a:r>
+              <a:rPr lang="en-US" dirty="0"/>
+              <a:t>)</a:t>
+            </a:r>
+          </a:p>
+        </p:txBody>
+      </p:sp>
+    </p:spTree>
+    <p:extLst>
+      <p:ext uri="{BB962C8B-B14F-4D97-AF65-F5344CB8AC3E}">
+        <p14:creationId xmlns:p14="http://schemas.microsoft.com/office/powerpoint/2010/main" val="4178893437"/>
+      </p:ext>
+    </p:extLst>
+  </p:cSld>
+  <p:clrMapOvr>
+    <a:masterClrMapping/>
+  </p:clrMapOvr>
+</p:sld>
+</file>
+
+<file path=ppt/slides/slide13.xml><?xml version="1.0" encoding="utf-8"?>
+<p:sld xmlns:a="http://schemas.openxmlformats.org/drawingml/2006/main" xmlns:r="http://schemas.openxmlformats.org/officeDocument/2006/relationships" xmlns:p="http://schemas.openxmlformats.org/presentationml/2006/main">
+  <p:cSld>
+    <p:spTree>
+      <p:nvGrpSpPr>
+        <p:cNvPr id="1" name=""/>
+        <p:cNvGrpSpPr/>
+        <p:nvPr/>
+      </p:nvGrpSpPr>
+      <p:grpSpPr>
+        <a:xfrm>
+          <a:off x="0" y="0"/>
+          <a:ext cx="0" cy="0"/>
+          <a:chOff x="0" y="0"/>
+          <a:chExt cx="0" cy="0"/>
+        </a:xfrm>
+      </p:grpSpPr>
+      <p:sp>
+        <p:nvSpPr>
+          <p:cNvPr id="2" name="Title 1">
+            <a:extLst>
+              <a:ext uri="{FF2B5EF4-FFF2-40B4-BE49-F238E27FC236}">
+                <a16:creationId xmlns:a16="http://schemas.microsoft.com/office/drawing/2014/main" id="{18CDBA54-9739-4AD5-BC58-14912BF8F559}"/>
+              </a:ext>
+            </a:extLst>
+          </p:cNvPr>
+          <p:cNvSpPr>
+            <a:spLocks noGrp="1"/>
+          </p:cNvSpPr>
+          <p:nvPr>
+            <p:ph type="title"/>
+          </p:nvPr>
+        </p:nvSpPr>
+        <p:spPr/>
+        <p:txBody>
+          <a:bodyPr/>
+          <a:lstStyle/>
+          <a:p>
+            <a:endParaRPr lang="en-US"/>
+          </a:p>
+        </p:txBody>
+      </p:sp>
+      <p:sp>
+        <p:nvSpPr>
+          <p:cNvPr id="3" name="Content Placeholder 2">
+            <a:extLst>
+              <a:ext uri="{FF2B5EF4-FFF2-40B4-BE49-F238E27FC236}">
+                <a16:creationId xmlns:a16="http://schemas.microsoft.com/office/drawing/2014/main" id="{AAD11E2B-C9E9-491E-BCE6-BE7BD48FC22D}"/>
+              </a:ext>
+            </a:extLst>
+          </p:cNvPr>
+          <p:cNvSpPr>
+            <a:spLocks noGrp="1"/>
+          </p:cNvSpPr>
+          <p:nvPr>
+            <p:ph idx="1"/>
+          </p:nvPr>
+        </p:nvSpPr>
+        <p:spPr/>
+        <p:txBody>
+          <a:bodyPr anchor="ctr">
+            <a:normAutofit/>
+          </a:bodyPr>
+          <a:lstStyle/>
+          <a:p>
+            <a:pPr marL="0" indent="0" algn="ctr">
+              <a:buNone/>
+            </a:pPr>
+            <a:r>
+              <a:rPr lang="en-US" sz="6000" dirty="0"/>
+              <a:t>Q&amp;A</a:t>
+            </a:r>
+          </a:p>
+        </p:txBody>
+      </p:sp>
+    </p:spTree>
+    <p:extLst>
+      <p:ext uri="{BB962C8B-B14F-4D97-AF65-F5344CB8AC3E}">
+        <p14:creationId xmlns:p14="http://schemas.microsoft.com/office/powerpoint/2010/main" val="1427994108"/>
       </p:ext>
     </p:extLst>
   </p:cSld>
@@ -3773,10 +5182,34 @@
           <a:p>
             <a:pPr algn="ctr"/>
             <a:r>
-              <a:rPr lang="en-US"/>
-              <a:t>Giới thiệu thành viên</a:t>
-            </a:r>
-            <a:endParaRPr lang="vi-VN"/>
+              <a:rPr lang="en-US" dirty="0" err="1"/>
+              <a:t>Giới</a:t>
+            </a:r>
+            <a:r>
+              <a:rPr lang="en-US" dirty="0"/>
+              <a:t> </a:t>
+            </a:r>
+            <a:r>
+              <a:rPr lang="en-US" dirty="0" err="1"/>
+              <a:t>thiệu</a:t>
+            </a:r>
+            <a:r>
+              <a:rPr lang="en-US" dirty="0"/>
+              <a:t> </a:t>
+            </a:r>
+            <a:r>
+              <a:rPr lang="en-US" dirty="0" err="1"/>
+              <a:t>thành</a:t>
+            </a:r>
+            <a:r>
+              <a:rPr lang="en-US" dirty="0"/>
+              <a:t> </a:t>
+            </a:r>
+            <a:r>
+              <a:rPr lang="en-US" dirty="0" err="1"/>
+              <a:t>viên</a:t>
+            </a:r>
+            <a:endParaRPr lang="vi-VN" dirty="0"/>
           </a:p>
         </p:txBody>
       </p:sp>
@@ -3801,7 +5234,7 @@
           <a:bodyPr/>
           <a:lstStyle/>
           <a:p>
-            <a:endParaRPr lang="vi-VN"/>
+            <a:endParaRPr lang="vi-VN" dirty="0"/>
           </a:p>
         </p:txBody>
       </p:sp>
@@ -3819,8 +5252,8 @@
         </p:nvSpPr>
         <p:spPr>
           <a:xfrm>
-            <a:off x="1849821" y="2764221"/>
-            <a:ext cx="1650124" cy="2070537"/>
+            <a:off x="1849820" y="2764221"/>
+            <a:ext cx="1965095" cy="2070537"/>
           </a:xfrm>
           <a:prstGeom prst="roundRect">
             <a:avLst/>
@@ -3848,8 +5281,16 @@
           <a:p>
             <a:pPr algn="ctr"/>
             <a:r>
-              <a:rPr lang="en-US"/>
-              <a:t>HÌNH</a:t>
+              <a:rPr lang="en-US" dirty="0"/>
+              <a:t>VÕ </a:t>
+            </a:r>
+            <a:r>
+              <a:rPr lang="en-US" dirty="0" err="1"/>
+              <a:t>TẤN</a:t>
+            </a:r>
+            <a:r>
+              <a:rPr lang="en-US" dirty="0"/>
+              <a:t> HOÀNG</a:t>
             </a:r>
           </a:p>
         </p:txBody>
@@ -3868,8 +5309,8 @@
         </p:nvSpPr>
         <p:spPr>
           <a:xfrm>
-            <a:off x="5186855" y="2764220"/>
-            <a:ext cx="1650124" cy="2070537"/>
+            <a:off x="5113452" y="2764219"/>
+            <a:ext cx="1965095" cy="2070537"/>
           </a:xfrm>
           <a:prstGeom prst="roundRect">
             <a:avLst/>
@@ -3897,9 +5338,26 @@
           <a:p>
             <a:pPr algn="ctr"/>
             <a:r>
-              <a:rPr lang="en-US"/>
-              <a:t>HÌNH</a:t>
-            </a:r>
+              <a:rPr lang="en-US" dirty="0" err="1"/>
+              <a:t>NGUYỄN</a:t>
+            </a:r>
+            <a:r>
+              <a:rPr lang="en-US" dirty="0"/>
+              <a:t> </a:t>
+            </a:r>
+            <a:r>
+              <a:rPr lang="en-US" dirty="0" err="1"/>
+              <a:t>THỊ</a:t>
+            </a:r>
+            <a:r>
+              <a:rPr lang="en-US" dirty="0"/>
+              <a:t> THANH </a:t>
+            </a:r>
+            <a:r>
+              <a:rPr lang="en-US" dirty="0" err="1"/>
+              <a:t>DUYÊN</a:t>
+            </a:r>
+            <a:endParaRPr lang="en-US" dirty="0"/>
           </a:p>
         </p:txBody>
       </p:sp>
@@ -3917,8 +5375,8 @@
         </p:nvSpPr>
         <p:spPr>
           <a:xfrm>
-            <a:off x="8692055" y="2764219"/>
-            <a:ext cx="1650124" cy="2070537"/>
+            <a:off x="8377084" y="2764219"/>
+            <a:ext cx="1965096" cy="2070537"/>
           </a:xfrm>
           <a:prstGeom prst="roundRect">
             <a:avLst/>
@@ -3946,9 +5404,18 @@
           <a:p>
             <a:pPr algn="ctr"/>
             <a:r>
-              <a:rPr lang="en-US"/>
-              <a:t>HÌNH</a:t>
-            </a:r>
+              <a:rPr lang="en-US" dirty="0" err="1"/>
+              <a:t>NGUYỄN</a:t>
+            </a:r>
+            <a:r>
+              <a:rPr lang="en-US" dirty="0"/>
+              <a:t> XUÂN </a:t>
+            </a:r>
+            <a:r>
+              <a:rPr lang="en-US" dirty="0" err="1"/>
+              <a:t>PHƯỚC</a:t>
+            </a:r>
+            <a:endParaRPr lang="en-US" dirty="0"/>
           </a:p>
         </p:txBody>
       </p:sp>
@@ -4004,8 +5471,12 @@
           <a:lstStyle/>
           <a:p>
             <a:r>
-              <a:rPr lang="en-US"/>
-              <a:t>OUTLINE</a:t>
+              <a:rPr lang="en-US" dirty="0" err="1"/>
+              <a:t>NỘI</a:t>
+            </a:r>
+            <a:r>
+              <a:rPr lang="en-US" dirty="0"/>
+              <a:t> DUNG</a:t>
             </a:r>
           </a:p>
         </p:txBody>
@@ -4036,9 +5507,18 @@
               <a:buAutoNum type="arabicPeriod"/>
             </a:pPr>
             <a:r>
-              <a:rPr lang="en-US"/>
-              <a:t>Giới thiệu</a:t>
-            </a:r>
+              <a:rPr lang="en-US" dirty="0" err="1"/>
+              <a:t>Giới</a:t>
+            </a:r>
+            <a:r>
+              <a:rPr lang="en-US" dirty="0"/>
+              <a:t> </a:t>
+            </a:r>
+            <a:r>
+              <a:rPr lang="en-US" dirty="0" err="1"/>
+              <a:t>thiệu</a:t>
+            </a:r>
+            <a:endParaRPr lang="en-US" dirty="0"/>
           </a:p>
           <a:p>
             <a:pPr marL="514350" indent="-514350">
@@ -4046,9 +5526,34 @@
               <a:buAutoNum type="arabicPeriod"/>
             </a:pPr>
             <a:r>
-              <a:rPr lang="en-US"/>
-              <a:t>…</a:t>
-            </a:r>
+              <a:rPr lang="en-US" dirty="0" err="1"/>
+              <a:t>Cơ</a:t>
+            </a:r>
+            <a:r>
+              <a:rPr lang="en-US" dirty="0"/>
+              <a:t> </a:t>
+            </a:r>
+            <a:r>
+              <a:rPr lang="en-US" dirty="0" err="1"/>
+              <a:t>sở</a:t>
+            </a:r>
+            <a:r>
+              <a:rPr lang="en-US" dirty="0"/>
+              <a:t> </a:t>
+            </a:r>
+            <a:r>
+              <a:rPr lang="en-US" dirty="0" err="1"/>
+              <a:t>dữ</a:t>
+            </a:r>
+            <a:r>
+              <a:rPr lang="en-US" dirty="0"/>
+              <a:t> </a:t>
+            </a:r>
+            <a:r>
+              <a:rPr lang="en-US" dirty="0" err="1"/>
+              <a:t>liệu</a:t>
+            </a:r>
+            <a:endParaRPr lang="en-US" dirty="0"/>
           </a:p>
           <a:p>
             <a:pPr marL="514350" indent="-514350">
@@ -4056,9 +5561,34 @@
               <a:buAutoNum type="arabicPeriod"/>
             </a:pPr>
             <a:r>
-              <a:rPr lang="en-US"/>
-              <a:t>….</a:t>
-            </a:r>
+              <a:rPr lang="en-US" dirty="0" err="1"/>
+              <a:t>Cấu</a:t>
+            </a:r>
+            <a:r>
+              <a:rPr lang="en-US" dirty="0"/>
+              <a:t> </a:t>
+            </a:r>
+            <a:r>
+              <a:rPr lang="en-US" dirty="0" err="1"/>
+              <a:t>trúc</a:t>
+            </a:r>
+            <a:r>
+              <a:rPr lang="en-US" dirty="0"/>
+              <a:t> </a:t>
+            </a:r>
+            <a:r>
+              <a:rPr lang="en-US" dirty="0" err="1"/>
+              <a:t>hệ</a:t>
+            </a:r>
+            <a:r>
+              <a:rPr lang="en-US" dirty="0"/>
+              <a:t> </a:t>
+            </a:r>
+            <a:r>
+              <a:rPr lang="en-US" dirty="0" err="1"/>
+              <a:t>thống</a:t>
+            </a:r>
+            <a:endParaRPr lang="en-US" dirty="0"/>
           </a:p>
           <a:p>
             <a:pPr marL="514350" indent="-514350">
@@ -4066,19 +5596,18 @@
               <a:buAutoNum type="arabicPeriod"/>
             </a:pPr>
             <a:r>
-              <a:rPr lang="en-US"/>
-              <a:t>….</a:t>
-            </a:r>
-          </a:p>
-          <a:p>
-            <a:pPr marL="514350" indent="-514350">
-              <a:buFont typeface="+mj-lt"/>
-              <a:buAutoNum type="arabicPeriod"/>
-            </a:pPr>
-            <a:r>
-              <a:rPr lang="en-US"/>
-              <a:t>Kết quả</a:t>
-            </a:r>
+              <a:rPr lang="en-US" dirty="0" err="1"/>
+              <a:t>Kết</a:t>
+            </a:r>
+            <a:r>
+              <a:rPr lang="en-US" dirty="0"/>
+              <a:t> </a:t>
+            </a:r>
+            <a:r>
+              <a:rPr lang="en-US" dirty="0" err="1"/>
+              <a:t>quả</a:t>
+            </a:r>
+            <a:endParaRPr lang="en-US" dirty="0"/>
           </a:p>
         </p:txBody>
       </p:sp>
@@ -4134,9 +5663,37 @@
           <a:lstStyle/>
           <a:p>
             <a:r>
-              <a:rPr lang="en-US"/>
-              <a:t>1. Giới thiệu</a:t>
-            </a:r>
+              <a:rPr lang="en-US" dirty="0">
+                <a:latin typeface="Arial" panose="020B0604020202020204" pitchFamily="34" charset="0"/>
+                <a:cs typeface="Arial" panose="020B0604020202020204" pitchFamily="34" charset="0"/>
+              </a:rPr>
+              <a:t>1. </a:t>
+            </a:r>
+            <a:r>
+              <a:rPr lang="en-US" dirty="0" err="1">
+                <a:latin typeface="Arial" panose="020B0604020202020204" pitchFamily="34" charset="0"/>
+                <a:cs typeface="Arial" panose="020B0604020202020204" pitchFamily="34" charset="0"/>
+              </a:rPr>
+              <a:t>Giới</a:t>
+            </a:r>
+            <a:r>
+              <a:rPr lang="en-US" dirty="0">
+                <a:latin typeface="Arial" panose="020B0604020202020204" pitchFamily="34" charset="0"/>
+                <a:cs typeface="Arial" panose="020B0604020202020204" pitchFamily="34" charset="0"/>
+              </a:rPr>
+              <a:t> </a:t>
+            </a:r>
+            <a:r>
+              <a:rPr lang="en-US" dirty="0" err="1">
+                <a:latin typeface="Arial" panose="020B0604020202020204" pitchFamily="34" charset="0"/>
+                <a:cs typeface="Arial" panose="020B0604020202020204" pitchFamily="34" charset="0"/>
+              </a:rPr>
+              <a:t>thiệu</a:t>
+            </a:r>
+            <a:endParaRPr lang="en-US" dirty="0">
+              <a:latin typeface="Arial" panose="020B0604020202020204" pitchFamily="34" charset="0"/>
+              <a:cs typeface="Arial" panose="020B0604020202020204" pitchFamily="34" charset="0"/>
+            </a:endParaRPr>
           </a:p>
         </p:txBody>
       </p:sp>
@@ -4158,13 +5715,1020 @@
         </p:nvSpPr>
         <p:spPr/>
         <p:txBody>
-          <a:bodyPr/>
+          <a:bodyPr>
+            <a:normAutofit/>
+          </a:bodyPr>
           <a:lstStyle/>
           <a:p>
             <a:r>
-              <a:rPr lang="en-US"/>
-              <a:t>01 silde</a:t>
-            </a:r>
+              <a:rPr lang="en-US" dirty="0">
+                <a:latin typeface="Arial" panose="020B0604020202020204" pitchFamily="34" charset="0"/>
+                <a:cs typeface="Arial" panose="020B0604020202020204" pitchFamily="34" charset="0"/>
+              </a:rPr>
+              <a:t>Trong </a:t>
+            </a:r>
+            <a:r>
+              <a:rPr lang="en-US" dirty="0" err="1">
+                <a:latin typeface="Arial" panose="020B0604020202020204" pitchFamily="34" charset="0"/>
+                <a:cs typeface="Arial" panose="020B0604020202020204" pitchFamily="34" charset="0"/>
+              </a:rPr>
+              <a:t>thời</a:t>
+            </a:r>
+            <a:r>
+              <a:rPr lang="en-US" dirty="0">
+                <a:latin typeface="Arial" panose="020B0604020202020204" pitchFamily="34" charset="0"/>
+                <a:cs typeface="Arial" panose="020B0604020202020204" pitchFamily="34" charset="0"/>
+              </a:rPr>
+              <a:t> </a:t>
+            </a:r>
+            <a:r>
+              <a:rPr lang="en-US" dirty="0" err="1">
+                <a:latin typeface="Arial" panose="020B0604020202020204" pitchFamily="34" charset="0"/>
+                <a:cs typeface="Arial" panose="020B0604020202020204" pitchFamily="34" charset="0"/>
+              </a:rPr>
+              <a:t>đại</a:t>
+            </a:r>
+            <a:r>
+              <a:rPr lang="en-US" dirty="0">
+                <a:latin typeface="Arial" panose="020B0604020202020204" pitchFamily="34" charset="0"/>
+                <a:cs typeface="Arial" panose="020B0604020202020204" pitchFamily="34" charset="0"/>
+              </a:rPr>
+              <a:t> </a:t>
+            </a:r>
+            <a:r>
+              <a:rPr lang="en-US" dirty="0" err="1">
+                <a:latin typeface="Arial" panose="020B0604020202020204" pitchFamily="34" charset="0"/>
+                <a:cs typeface="Arial" panose="020B0604020202020204" pitchFamily="34" charset="0"/>
+              </a:rPr>
+              <a:t>số</a:t>
+            </a:r>
+            <a:r>
+              <a:rPr lang="en-US" dirty="0">
+                <a:latin typeface="Arial" panose="020B0604020202020204" pitchFamily="34" charset="0"/>
+                <a:cs typeface="Arial" panose="020B0604020202020204" pitchFamily="34" charset="0"/>
+              </a:rPr>
+              <a:t> </a:t>
+            </a:r>
+            <a:r>
+              <a:rPr lang="en-US" dirty="0" err="1">
+                <a:latin typeface="Arial" panose="020B0604020202020204" pitchFamily="34" charset="0"/>
+                <a:cs typeface="Arial" panose="020B0604020202020204" pitchFamily="34" charset="0"/>
+              </a:rPr>
+              <a:t>hóa</a:t>
+            </a:r>
+            <a:r>
+              <a:rPr lang="en-US" dirty="0">
+                <a:latin typeface="Arial" panose="020B0604020202020204" pitchFamily="34" charset="0"/>
+                <a:cs typeface="Arial" panose="020B0604020202020204" pitchFamily="34" charset="0"/>
+              </a:rPr>
+              <a:t> </a:t>
+            </a:r>
+            <a:r>
+              <a:rPr lang="en-US" dirty="0" err="1">
+                <a:latin typeface="Arial" panose="020B0604020202020204" pitchFamily="34" charset="0"/>
+                <a:cs typeface="Arial" panose="020B0604020202020204" pitchFamily="34" charset="0"/>
+              </a:rPr>
+              <a:t>ngày</a:t>
+            </a:r>
+            <a:r>
+              <a:rPr lang="en-US" dirty="0">
+                <a:latin typeface="Arial" panose="020B0604020202020204" pitchFamily="34" charset="0"/>
+                <a:cs typeface="Arial" panose="020B0604020202020204" pitchFamily="34" charset="0"/>
+              </a:rPr>
+              <a:t> nay, </a:t>
+            </a:r>
+            <a:r>
+              <a:rPr lang="en-US" dirty="0" err="1">
+                <a:latin typeface="Arial" panose="020B0604020202020204" pitchFamily="34" charset="0"/>
+                <a:cs typeface="Arial" panose="020B0604020202020204" pitchFamily="34" charset="0"/>
+              </a:rPr>
+              <a:t>việc</a:t>
+            </a:r>
+            <a:r>
+              <a:rPr lang="en-US" dirty="0">
+                <a:latin typeface="Arial" panose="020B0604020202020204" pitchFamily="34" charset="0"/>
+                <a:cs typeface="Arial" panose="020B0604020202020204" pitchFamily="34" charset="0"/>
+              </a:rPr>
+              <a:t> </a:t>
+            </a:r>
+            <a:r>
+              <a:rPr lang="en-US" dirty="0" err="1">
+                <a:latin typeface="Arial" panose="020B0604020202020204" pitchFamily="34" charset="0"/>
+                <a:cs typeface="Arial" panose="020B0604020202020204" pitchFamily="34" charset="0"/>
+              </a:rPr>
+              <a:t>áp</a:t>
+            </a:r>
+            <a:r>
+              <a:rPr lang="en-US" dirty="0">
+                <a:latin typeface="Arial" panose="020B0604020202020204" pitchFamily="34" charset="0"/>
+                <a:cs typeface="Arial" panose="020B0604020202020204" pitchFamily="34" charset="0"/>
+              </a:rPr>
+              <a:t> </a:t>
+            </a:r>
+            <a:r>
+              <a:rPr lang="en-US" dirty="0" err="1">
+                <a:latin typeface="Arial" panose="020B0604020202020204" pitchFamily="34" charset="0"/>
+                <a:cs typeface="Arial" panose="020B0604020202020204" pitchFamily="34" charset="0"/>
+              </a:rPr>
+              <a:t>dụng</a:t>
+            </a:r>
+            <a:r>
+              <a:rPr lang="en-US" dirty="0">
+                <a:latin typeface="Arial" panose="020B0604020202020204" pitchFamily="34" charset="0"/>
+                <a:cs typeface="Arial" panose="020B0604020202020204" pitchFamily="34" charset="0"/>
+              </a:rPr>
+              <a:t> </a:t>
+            </a:r>
+            <a:r>
+              <a:rPr lang="en-US" dirty="0" err="1">
+                <a:latin typeface="Arial" panose="020B0604020202020204" pitchFamily="34" charset="0"/>
+                <a:cs typeface="Arial" panose="020B0604020202020204" pitchFamily="34" charset="0"/>
+              </a:rPr>
+              <a:t>công</a:t>
+            </a:r>
+            <a:r>
+              <a:rPr lang="en-US" dirty="0">
+                <a:latin typeface="Arial" panose="020B0604020202020204" pitchFamily="34" charset="0"/>
+                <a:cs typeface="Arial" panose="020B0604020202020204" pitchFamily="34" charset="0"/>
+              </a:rPr>
+              <a:t> </a:t>
+            </a:r>
+            <a:r>
+              <a:rPr lang="en-US" dirty="0" err="1">
+                <a:latin typeface="Arial" panose="020B0604020202020204" pitchFamily="34" charset="0"/>
+                <a:cs typeface="Arial" panose="020B0604020202020204" pitchFamily="34" charset="0"/>
+              </a:rPr>
+              <a:t>nghệ</a:t>
+            </a:r>
+            <a:r>
+              <a:rPr lang="en-US" dirty="0">
+                <a:latin typeface="Arial" panose="020B0604020202020204" pitchFamily="34" charset="0"/>
+                <a:cs typeface="Arial" panose="020B0604020202020204" pitchFamily="34" charset="0"/>
+              </a:rPr>
+              <a:t> </a:t>
+            </a:r>
+            <a:r>
+              <a:rPr lang="en-US" dirty="0" err="1">
+                <a:latin typeface="Arial" panose="020B0604020202020204" pitchFamily="34" charset="0"/>
+                <a:cs typeface="Arial" panose="020B0604020202020204" pitchFamily="34" charset="0"/>
+              </a:rPr>
+              <a:t>thông</a:t>
+            </a:r>
+            <a:r>
+              <a:rPr lang="en-US" dirty="0">
+                <a:latin typeface="Arial" panose="020B0604020202020204" pitchFamily="34" charset="0"/>
+                <a:cs typeface="Arial" panose="020B0604020202020204" pitchFamily="34" charset="0"/>
+              </a:rPr>
+              <a:t> tin </a:t>
+            </a:r>
+            <a:r>
+              <a:rPr lang="en-US" dirty="0" err="1">
+                <a:latin typeface="Arial" panose="020B0604020202020204" pitchFamily="34" charset="0"/>
+                <a:cs typeface="Arial" panose="020B0604020202020204" pitchFamily="34" charset="0"/>
+              </a:rPr>
+              <a:t>đã</a:t>
+            </a:r>
+            <a:r>
+              <a:rPr lang="en-US" dirty="0">
+                <a:latin typeface="Arial" panose="020B0604020202020204" pitchFamily="34" charset="0"/>
+                <a:cs typeface="Arial" panose="020B0604020202020204" pitchFamily="34" charset="0"/>
+              </a:rPr>
+              <a:t> </a:t>
+            </a:r>
+            <a:r>
+              <a:rPr lang="en-US" dirty="0" err="1">
+                <a:latin typeface="Arial" panose="020B0604020202020204" pitchFamily="34" charset="0"/>
+                <a:cs typeface="Arial" panose="020B0604020202020204" pitchFamily="34" charset="0"/>
+              </a:rPr>
+              <a:t>trở</a:t>
+            </a:r>
+            <a:r>
+              <a:rPr lang="en-US" dirty="0">
+                <a:latin typeface="Arial" panose="020B0604020202020204" pitchFamily="34" charset="0"/>
+                <a:cs typeface="Arial" panose="020B0604020202020204" pitchFamily="34" charset="0"/>
+              </a:rPr>
+              <a:t> </a:t>
+            </a:r>
+            <a:r>
+              <a:rPr lang="en-US" dirty="0" err="1">
+                <a:latin typeface="Arial" panose="020B0604020202020204" pitchFamily="34" charset="0"/>
+                <a:cs typeface="Arial" panose="020B0604020202020204" pitchFamily="34" charset="0"/>
+              </a:rPr>
+              <a:t>thành</a:t>
+            </a:r>
+            <a:r>
+              <a:rPr lang="en-US" dirty="0">
+                <a:latin typeface="Arial" panose="020B0604020202020204" pitchFamily="34" charset="0"/>
+                <a:cs typeface="Arial" panose="020B0604020202020204" pitchFamily="34" charset="0"/>
+              </a:rPr>
+              <a:t> </a:t>
+            </a:r>
+            <a:r>
+              <a:rPr lang="en-US" dirty="0" err="1">
+                <a:latin typeface="Arial" panose="020B0604020202020204" pitchFamily="34" charset="0"/>
+                <a:cs typeface="Arial" panose="020B0604020202020204" pitchFamily="34" charset="0"/>
+              </a:rPr>
+              <a:t>trọng</a:t>
+            </a:r>
+            <a:r>
+              <a:rPr lang="en-US" dirty="0">
+                <a:latin typeface="Arial" panose="020B0604020202020204" pitchFamily="34" charset="0"/>
+                <a:cs typeface="Arial" panose="020B0604020202020204" pitchFamily="34" charset="0"/>
+              </a:rPr>
+              <a:t> </a:t>
+            </a:r>
+            <a:r>
+              <a:rPr lang="en-US" dirty="0" err="1">
+                <a:latin typeface="Arial" panose="020B0604020202020204" pitchFamily="34" charset="0"/>
+                <a:cs typeface="Arial" panose="020B0604020202020204" pitchFamily="34" charset="0"/>
+              </a:rPr>
+              <a:t>tâm</a:t>
+            </a:r>
+            <a:r>
+              <a:rPr lang="en-US" dirty="0">
+                <a:latin typeface="Arial" panose="020B0604020202020204" pitchFamily="34" charset="0"/>
+                <a:cs typeface="Arial" panose="020B0604020202020204" pitchFamily="34" charset="0"/>
+              </a:rPr>
+              <a:t> </a:t>
+            </a:r>
+            <a:r>
+              <a:rPr lang="en-US" dirty="0" err="1">
+                <a:latin typeface="Arial" panose="020B0604020202020204" pitchFamily="34" charset="0"/>
+                <a:cs typeface="Arial" panose="020B0604020202020204" pitchFamily="34" charset="0"/>
+              </a:rPr>
+              <a:t>quan</a:t>
+            </a:r>
+            <a:r>
+              <a:rPr lang="en-US" dirty="0">
+                <a:latin typeface="Arial" panose="020B0604020202020204" pitchFamily="34" charset="0"/>
+                <a:cs typeface="Arial" panose="020B0604020202020204" pitchFamily="34" charset="0"/>
+              </a:rPr>
+              <a:t> </a:t>
+            </a:r>
+            <a:r>
+              <a:rPr lang="en-US" dirty="0" err="1">
+                <a:latin typeface="Arial" panose="020B0604020202020204" pitchFamily="34" charset="0"/>
+                <a:cs typeface="Arial" panose="020B0604020202020204" pitchFamily="34" charset="0"/>
+              </a:rPr>
+              <a:t>trọng</a:t>
+            </a:r>
+            <a:r>
+              <a:rPr lang="en-US" dirty="0">
+                <a:latin typeface="Arial" panose="020B0604020202020204" pitchFamily="34" charset="0"/>
+                <a:cs typeface="Arial" panose="020B0604020202020204" pitchFamily="34" charset="0"/>
+              </a:rPr>
+              <a:t> </a:t>
+            </a:r>
+            <a:r>
+              <a:rPr lang="en-US" dirty="0" err="1">
+                <a:latin typeface="Arial" panose="020B0604020202020204" pitchFamily="34" charset="0"/>
+                <a:cs typeface="Arial" panose="020B0604020202020204" pitchFamily="34" charset="0"/>
+              </a:rPr>
+              <a:t>đối</a:t>
+            </a:r>
+            <a:r>
+              <a:rPr lang="en-US" dirty="0">
+                <a:latin typeface="Arial" panose="020B0604020202020204" pitchFamily="34" charset="0"/>
+                <a:cs typeface="Arial" panose="020B0604020202020204" pitchFamily="34" charset="0"/>
+              </a:rPr>
+              <a:t> </a:t>
+            </a:r>
+            <a:r>
+              <a:rPr lang="en-US" dirty="0" err="1">
+                <a:latin typeface="Arial" panose="020B0604020202020204" pitchFamily="34" charset="0"/>
+                <a:cs typeface="Arial" panose="020B0604020202020204" pitchFamily="34" charset="0"/>
+              </a:rPr>
+              <a:t>với</a:t>
+            </a:r>
+            <a:r>
+              <a:rPr lang="en-US" dirty="0">
+                <a:latin typeface="Arial" panose="020B0604020202020204" pitchFamily="34" charset="0"/>
+                <a:cs typeface="Arial" panose="020B0604020202020204" pitchFamily="34" charset="0"/>
+              </a:rPr>
+              <a:t> </a:t>
+            </a:r>
+            <a:r>
+              <a:rPr lang="en-US" dirty="0" err="1">
+                <a:latin typeface="Arial" panose="020B0604020202020204" pitchFamily="34" charset="0"/>
+                <a:cs typeface="Arial" panose="020B0604020202020204" pitchFamily="34" charset="0"/>
+              </a:rPr>
+              <a:t>nhiều</a:t>
+            </a:r>
+            <a:r>
+              <a:rPr lang="en-US" dirty="0">
+                <a:latin typeface="Arial" panose="020B0604020202020204" pitchFamily="34" charset="0"/>
+                <a:cs typeface="Arial" panose="020B0604020202020204" pitchFamily="34" charset="0"/>
+              </a:rPr>
+              <a:t> </a:t>
+            </a:r>
+            <a:r>
+              <a:rPr lang="en-US" dirty="0" err="1">
+                <a:latin typeface="Arial" panose="020B0604020202020204" pitchFamily="34" charset="0"/>
+                <a:cs typeface="Arial" panose="020B0604020202020204" pitchFamily="34" charset="0"/>
+              </a:rPr>
+              <a:t>ngành</a:t>
+            </a:r>
+            <a:r>
+              <a:rPr lang="en-US" dirty="0">
+                <a:latin typeface="Arial" panose="020B0604020202020204" pitchFamily="34" charset="0"/>
+                <a:cs typeface="Arial" panose="020B0604020202020204" pitchFamily="34" charset="0"/>
+              </a:rPr>
+              <a:t>.</a:t>
+            </a:r>
+          </a:p>
+          <a:p>
+            <a:r>
+              <a:rPr lang="en-US" dirty="0" err="1">
+                <a:latin typeface="Arial" panose="020B0604020202020204" pitchFamily="34" charset="0"/>
+                <a:cs typeface="Arial" panose="020B0604020202020204" pitchFamily="34" charset="0"/>
+              </a:rPr>
+              <a:t>Đề</a:t>
+            </a:r>
+            <a:r>
+              <a:rPr lang="en-US" dirty="0">
+                <a:latin typeface="Arial" panose="020B0604020202020204" pitchFamily="34" charset="0"/>
+                <a:cs typeface="Arial" panose="020B0604020202020204" pitchFamily="34" charset="0"/>
+              </a:rPr>
+              <a:t> </a:t>
+            </a:r>
+            <a:r>
+              <a:rPr lang="en-US" dirty="0" err="1">
+                <a:latin typeface="Arial" panose="020B0604020202020204" pitchFamily="34" charset="0"/>
+                <a:cs typeface="Arial" panose="020B0604020202020204" pitchFamily="34" charset="0"/>
+              </a:rPr>
+              <a:t>tài</a:t>
+            </a:r>
+            <a:r>
+              <a:rPr lang="en-US" dirty="0">
+                <a:latin typeface="Arial" panose="020B0604020202020204" pitchFamily="34" charset="0"/>
+                <a:cs typeface="Arial" panose="020B0604020202020204" pitchFamily="34" charset="0"/>
+              </a:rPr>
+              <a:t> </a:t>
+            </a:r>
+            <a:r>
+              <a:rPr lang="en-US" dirty="0" err="1">
+                <a:latin typeface="Arial" panose="020B0604020202020204" pitchFamily="34" charset="0"/>
+                <a:cs typeface="Arial" panose="020B0604020202020204" pitchFamily="34" charset="0"/>
+              </a:rPr>
+              <a:t>quản</a:t>
+            </a:r>
+            <a:r>
+              <a:rPr lang="en-US" dirty="0">
+                <a:latin typeface="Arial" panose="020B0604020202020204" pitchFamily="34" charset="0"/>
+                <a:cs typeface="Arial" panose="020B0604020202020204" pitchFamily="34" charset="0"/>
+              </a:rPr>
+              <a:t> </a:t>
+            </a:r>
+            <a:r>
+              <a:rPr lang="en-US" dirty="0" err="1">
+                <a:latin typeface="Arial" panose="020B0604020202020204" pitchFamily="34" charset="0"/>
+                <a:cs typeface="Arial" panose="020B0604020202020204" pitchFamily="34" charset="0"/>
+              </a:rPr>
+              <a:t>lý</a:t>
+            </a:r>
+            <a:r>
+              <a:rPr lang="en-US" dirty="0">
+                <a:latin typeface="Arial" panose="020B0604020202020204" pitchFamily="34" charset="0"/>
+                <a:cs typeface="Arial" panose="020B0604020202020204" pitchFamily="34" charset="0"/>
+              </a:rPr>
+              <a:t> </a:t>
+            </a:r>
+            <a:r>
+              <a:rPr lang="en-US" dirty="0" err="1">
+                <a:latin typeface="Arial" panose="020B0604020202020204" pitchFamily="34" charset="0"/>
+                <a:cs typeface="Arial" panose="020B0604020202020204" pitchFamily="34" charset="0"/>
+              </a:rPr>
+              <a:t>ngân</a:t>
+            </a:r>
+            <a:r>
+              <a:rPr lang="en-US" dirty="0">
+                <a:latin typeface="Arial" panose="020B0604020202020204" pitchFamily="34" charset="0"/>
+                <a:cs typeface="Arial" panose="020B0604020202020204" pitchFamily="34" charset="0"/>
+              </a:rPr>
+              <a:t> </a:t>
+            </a:r>
+            <a:r>
+              <a:rPr lang="en-US" dirty="0" err="1">
+                <a:latin typeface="Arial" panose="020B0604020202020204" pitchFamily="34" charset="0"/>
+                <a:cs typeface="Arial" panose="020B0604020202020204" pitchFamily="34" charset="0"/>
+              </a:rPr>
+              <a:t>hàng</a:t>
+            </a:r>
+            <a:r>
+              <a:rPr lang="en-US" dirty="0">
+                <a:latin typeface="Arial" panose="020B0604020202020204" pitchFamily="34" charset="0"/>
+                <a:cs typeface="Arial" panose="020B0604020202020204" pitchFamily="34" charset="0"/>
+              </a:rPr>
+              <a:t> </a:t>
+            </a:r>
+            <a:r>
+              <a:rPr lang="en-US" dirty="0" err="1">
+                <a:latin typeface="Arial" panose="020B0604020202020204" pitchFamily="34" charset="0"/>
+                <a:cs typeface="Arial" panose="020B0604020202020204" pitchFamily="34" charset="0"/>
+              </a:rPr>
+              <a:t>chú</a:t>
+            </a:r>
+            <a:r>
+              <a:rPr lang="en-US" dirty="0">
+                <a:latin typeface="Arial" panose="020B0604020202020204" pitchFamily="34" charset="0"/>
+                <a:cs typeface="Arial" panose="020B0604020202020204" pitchFamily="34" charset="0"/>
+              </a:rPr>
+              <a:t> </a:t>
+            </a:r>
+            <a:r>
+              <a:rPr lang="en-US" dirty="0" err="1">
+                <a:latin typeface="Arial" panose="020B0604020202020204" pitchFamily="34" charset="0"/>
+                <a:cs typeface="Arial" panose="020B0604020202020204" pitchFamily="34" charset="0"/>
+              </a:rPr>
+              <a:t>trọng</a:t>
+            </a:r>
+            <a:r>
+              <a:rPr lang="en-US" dirty="0">
+                <a:latin typeface="Arial" panose="020B0604020202020204" pitchFamily="34" charset="0"/>
+                <a:cs typeface="Arial" panose="020B0604020202020204" pitchFamily="34" charset="0"/>
+              </a:rPr>
+              <a:t> </a:t>
+            </a:r>
+            <a:r>
+              <a:rPr lang="en-US" dirty="0" err="1">
+                <a:latin typeface="Arial" panose="020B0604020202020204" pitchFamily="34" charset="0"/>
+                <a:cs typeface="Arial" panose="020B0604020202020204" pitchFamily="34" charset="0"/>
+              </a:rPr>
+              <a:t>vào</a:t>
+            </a:r>
+            <a:r>
+              <a:rPr lang="en-US" dirty="0">
+                <a:latin typeface="Arial" panose="020B0604020202020204" pitchFamily="34" charset="0"/>
+                <a:cs typeface="Arial" panose="020B0604020202020204" pitchFamily="34" charset="0"/>
+              </a:rPr>
+              <a:t> </a:t>
+            </a:r>
+            <a:r>
+              <a:rPr lang="en-US" dirty="0" err="1">
+                <a:latin typeface="Arial" panose="020B0604020202020204" pitchFamily="34" charset="0"/>
+                <a:cs typeface="Arial" panose="020B0604020202020204" pitchFamily="34" charset="0"/>
+              </a:rPr>
+              <a:t>việc</a:t>
+            </a:r>
+            <a:r>
+              <a:rPr lang="en-US" dirty="0">
+                <a:latin typeface="Arial" panose="020B0604020202020204" pitchFamily="34" charset="0"/>
+                <a:cs typeface="Arial" panose="020B0604020202020204" pitchFamily="34" charset="0"/>
+              </a:rPr>
+              <a:t> </a:t>
+            </a:r>
+            <a:r>
+              <a:rPr lang="en-US" dirty="0" err="1">
+                <a:latin typeface="Arial" panose="020B0604020202020204" pitchFamily="34" charset="0"/>
+                <a:cs typeface="Arial" panose="020B0604020202020204" pitchFamily="34" charset="0"/>
+              </a:rPr>
+              <a:t>tạo</a:t>
+            </a:r>
+            <a:r>
+              <a:rPr lang="en-US" dirty="0">
+                <a:latin typeface="Arial" panose="020B0604020202020204" pitchFamily="34" charset="0"/>
+                <a:cs typeface="Arial" panose="020B0604020202020204" pitchFamily="34" charset="0"/>
+              </a:rPr>
+              <a:t> </a:t>
+            </a:r>
+            <a:r>
+              <a:rPr lang="en-US" dirty="0" err="1">
+                <a:latin typeface="Arial" panose="020B0604020202020204" pitchFamily="34" charset="0"/>
+                <a:cs typeface="Arial" panose="020B0604020202020204" pitchFamily="34" charset="0"/>
+              </a:rPr>
+              <a:t>ra</a:t>
+            </a:r>
+            <a:r>
+              <a:rPr lang="en-US" dirty="0">
+                <a:latin typeface="Arial" panose="020B0604020202020204" pitchFamily="34" charset="0"/>
+                <a:cs typeface="Arial" panose="020B0604020202020204" pitchFamily="34" charset="0"/>
+              </a:rPr>
+              <a:t> </a:t>
+            </a:r>
+            <a:r>
+              <a:rPr lang="en-US" dirty="0" err="1">
+                <a:latin typeface="Arial" panose="020B0604020202020204" pitchFamily="34" charset="0"/>
+                <a:cs typeface="Arial" panose="020B0604020202020204" pitchFamily="34" charset="0"/>
+              </a:rPr>
+              <a:t>một</a:t>
+            </a:r>
+            <a:r>
+              <a:rPr lang="en-US" dirty="0">
+                <a:latin typeface="Arial" panose="020B0604020202020204" pitchFamily="34" charset="0"/>
+                <a:cs typeface="Arial" panose="020B0604020202020204" pitchFamily="34" charset="0"/>
+              </a:rPr>
+              <a:t> </a:t>
+            </a:r>
+            <a:r>
+              <a:rPr lang="en-US" dirty="0" err="1">
+                <a:latin typeface="Arial" panose="020B0604020202020204" pitchFamily="34" charset="0"/>
+                <a:cs typeface="Arial" panose="020B0604020202020204" pitchFamily="34" charset="0"/>
+              </a:rPr>
+              <a:t>giải</a:t>
+            </a:r>
+            <a:r>
+              <a:rPr lang="en-US" dirty="0">
+                <a:latin typeface="Arial" panose="020B0604020202020204" pitchFamily="34" charset="0"/>
+                <a:cs typeface="Arial" panose="020B0604020202020204" pitchFamily="34" charset="0"/>
+              </a:rPr>
+              <a:t> </a:t>
+            </a:r>
+            <a:r>
+              <a:rPr lang="en-US" dirty="0" err="1">
+                <a:latin typeface="Arial" panose="020B0604020202020204" pitchFamily="34" charset="0"/>
+                <a:cs typeface="Arial" panose="020B0604020202020204" pitchFamily="34" charset="0"/>
+              </a:rPr>
+              <a:t>pháp</a:t>
+            </a:r>
+            <a:r>
+              <a:rPr lang="en-US" dirty="0">
+                <a:latin typeface="Arial" panose="020B0604020202020204" pitchFamily="34" charset="0"/>
+                <a:cs typeface="Arial" panose="020B0604020202020204" pitchFamily="34" charset="0"/>
+              </a:rPr>
+              <a:t> </a:t>
+            </a:r>
+            <a:r>
+              <a:rPr lang="en-US" dirty="0" err="1">
+                <a:latin typeface="Arial" panose="020B0604020202020204" pitchFamily="34" charset="0"/>
+                <a:cs typeface="Arial" panose="020B0604020202020204" pitchFamily="34" charset="0"/>
+              </a:rPr>
+              <a:t>toàn</a:t>
+            </a:r>
+            <a:r>
+              <a:rPr lang="en-US" dirty="0">
+                <a:latin typeface="Arial" panose="020B0604020202020204" pitchFamily="34" charset="0"/>
+                <a:cs typeface="Arial" panose="020B0604020202020204" pitchFamily="34" charset="0"/>
+              </a:rPr>
+              <a:t> </a:t>
+            </a:r>
+            <a:r>
+              <a:rPr lang="en-US" dirty="0" err="1">
+                <a:latin typeface="Arial" panose="020B0604020202020204" pitchFamily="34" charset="0"/>
+                <a:cs typeface="Arial" panose="020B0604020202020204" pitchFamily="34" charset="0"/>
+              </a:rPr>
+              <a:t>diện</a:t>
+            </a:r>
+            <a:r>
+              <a:rPr lang="en-US" dirty="0">
+                <a:latin typeface="Arial" panose="020B0604020202020204" pitchFamily="34" charset="0"/>
+                <a:cs typeface="Arial" panose="020B0604020202020204" pitchFamily="34" charset="0"/>
+              </a:rPr>
+              <a:t> </a:t>
+            </a:r>
+            <a:r>
+              <a:rPr lang="en-US" dirty="0" err="1">
+                <a:latin typeface="Arial" panose="020B0604020202020204" pitchFamily="34" charset="0"/>
+                <a:cs typeface="Arial" panose="020B0604020202020204" pitchFamily="34" charset="0"/>
+              </a:rPr>
+              <a:t>cho</a:t>
+            </a:r>
+            <a:r>
+              <a:rPr lang="en-US" dirty="0">
+                <a:latin typeface="Arial" panose="020B0604020202020204" pitchFamily="34" charset="0"/>
+                <a:cs typeface="Arial" panose="020B0604020202020204" pitchFamily="34" charset="0"/>
+              </a:rPr>
+              <a:t> </a:t>
+            </a:r>
+            <a:r>
+              <a:rPr lang="en-US" dirty="0" err="1">
+                <a:latin typeface="Arial" panose="020B0604020202020204" pitchFamily="34" charset="0"/>
+                <a:cs typeface="Arial" panose="020B0604020202020204" pitchFamily="34" charset="0"/>
+              </a:rPr>
+              <a:t>quản</a:t>
+            </a:r>
+            <a:r>
+              <a:rPr lang="en-US" dirty="0">
+                <a:latin typeface="Arial" panose="020B0604020202020204" pitchFamily="34" charset="0"/>
+                <a:cs typeface="Arial" panose="020B0604020202020204" pitchFamily="34" charset="0"/>
+              </a:rPr>
+              <a:t> </a:t>
+            </a:r>
+            <a:r>
+              <a:rPr lang="en-US" dirty="0" err="1">
+                <a:latin typeface="Arial" panose="020B0604020202020204" pitchFamily="34" charset="0"/>
+                <a:cs typeface="Arial" panose="020B0604020202020204" pitchFamily="34" charset="0"/>
+              </a:rPr>
+              <a:t>lý</a:t>
+            </a:r>
+            <a:r>
+              <a:rPr lang="en-US" dirty="0">
+                <a:latin typeface="Arial" panose="020B0604020202020204" pitchFamily="34" charset="0"/>
+                <a:cs typeface="Arial" panose="020B0604020202020204" pitchFamily="34" charset="0"/>
+              </a:rPr>
+              <a:t> chi </a:t>
+            </a:r>
+            <a:r>
+              <a:rPr lang="en-US" dirty="0" err="1">
+                <a:latin typeface="Arial" panose="020B0604020202020204" pitchFamily="34" charset="0"/>
+                <a:cs typeface="Arial" panose="020B0604020202020204" pitchFamily="34" charset="0"/>
+              </a:rPr>
+              <a:t>nhánh</a:t>
+            </a:r>
+            <a:r>
+              <a:rPr lang="en-US" dirty="0">
+                <a:latin typeface="Arial" panose="020B0604020202020204" pitchFamily="34" charset="0"/>
+                <a:cs typeface="Arial" panose="020B0604020202020204" pitchFamily="34" charset="0"/>
+              </a:rPr>
+              <a:t> </a:t>
+            </a:r>
+            <a:r>
+              <a:rPr lang="en-US" dirty="0" err="1">
+                <a:latin typeface="Arial" panose="020B0604020202020204" pitchFamily="34" charset="0"/>
+                <a:cs typeface="Arial" panose="020B0604020202020204" pitchFamily="34" charset="0"/>
+              </a:rPr>
+              <a:t>ngân</a:t>
+            </a:r>
+            <a:r>
+              <a:rPr lang="en-US" dirty="0">
+                <a:latin typeface="Arial" panose="020B0604020202020204" pitchFamily="34" charset="0"/>
+                <a:cs typeface="Arial" panose="020B0604020202020204" pitchFamily="34" charset="0"/>
+              </a:rPr>
+              <a:t> </a:t>
+            </a:r>
+            <a:r>
+              <a:rPr lang="en-US" dirty="0" err="1">
+                <a:latin typeface="Arial" panose="020B0604020202020204" pitchFamily="34" charset="0"/>
+                <a:cs typeface="Arial" panose="020B0604020202020204" pitchFamily="34" charset="0"/>
+              </a:rPr>
+              <a:t>hàng</a:t>
+            </a:r>
+            <a:r>
+              <a:rPr lang="en-US" dirty="0">
+                <a:latin typeface="Arial" panose="020B0604020202020204" pitchFamily="34" charset="0"/>
+                <a:cs typeface="Arial" panose="020B0604020202020204" pitchFamily="34" charset="0"/>
+              </a:rPr>
+              <a:t>, </a:t>
+            </a:r>
+            <a:r>
+              <a:rPr lang="en-US" dirty="0" err="1">
+                <a:latin typeface="Arial" panose="020B0604020202020204" pitchFamily="34" charset="0"/>
+                <a:cs typeface="Arial" panose="020B0604020202020204" pitchFamily="34" charset="0"/>
+              </a:rPr>
+              <a:t>cung</a:t>
+            </a:r>
+            <a:r>
+              <a:rPr lang="en-US" dirty="0">
+                <a:latin typeface="Arial" panose="020B0604020202020204" pitchFamily="34" charset="0"/>
+                <a:cs typeface="Arial" panose="020B0604020202020204" pitchFamily="34" charset="0"/>
+              </a:rPr>
+              <a:t> </a:t>
+            </a:r>
+            <a:r>
+              <a:rPr lang="en-US" dirty="0" err="1">
+                <a:latin typeface="Arial" panose="020B0604020202020204" pitchFamily="34" charset="0"/>
+                <a:cs typeface="Arial" panose="020B0604020202020204" pitchFamily="34" charset="0"/>
+              </a:rPr>
+              <a:t>cấp</a:t>
+            </a:r>
+            <a:r>
+              <a:rPr lang="en-US" dirty="0">
+                <a:latin typeface="Arial" panose="020B0604020202020204" pitchFamily="34" charset="0"/>
+                <a:cs typeface="Arial" panose="020B0604020202020204" pitchFamily="34" charset="0"/>
+              </a:rPr>
+              <a:t> </a:t>
+            </a:r>
+            <a:r>
+              <a:rPr lang="en-US" dirty="0" err="1">
+                <a:latin typeface="Arial" panose="020B0604020202020204" pitchFamily="34" charset="0"/>
+                <a:cs typeface="Arial" panose="020B0604020202020204" pitchFamily="34" charset="0"/>
+              </a:rPr>
+              <a:t>khả</a:t>
+            </a:r>
+            <a:r>
+              <a:rPr lang="en-US" dirty="0">
+                <a:latin typeface="Arial" panose="020B0604020202020204" pitchFamily="34" charset="0"/>
+                <a:cs typeface="Arial" panose="020B0604020202020204" pitchFamily="34" charset="0"/>
+              </a:rPr>
+              <a:t> </a:t>
+            </a:r>
+            <a:r>
+              <a:rPr lang="en-US" dirty="0" err="1">
+                <a:latin typeface="Arial" panose="020B0604020202020204" pitchFamily="34" charset="0"/>
+                <a:cs typeface="Arial" panose="020B0604020202020204" pitchFamily="34" charset="0"/>
+              </a:rPr>
+              <a:t>năng</a:t>
+            </a:r>
+            <a:r>
+              <a:rPr lang="en-US" dirty="0">
+                <a:latin typeface="Arial" panose="020B0604020202020204" pitchFamily="34" charset="0"/>
+                <a:cs typeface="Arial" panose="020B0604020202020204" pitchFamily="34" charset="0"/>
+              </a:rPr>
+              <a:t> </a:t>
+            </a:r>
+            <a:r>
+              <a:rPr lang="en-US" dirty="0" err="1">
+                <a:latin typeface="Arial" panose="020B0604020202020204" pitchFamily="34" charset="0"/>
+                <a:cs typeface="Arial" panose="020B0604020202020204" pitchFamily="34" charset="0"/>
+              </a:rPr>
+              <a:t>quản</a:t>
+            </a:r>
+            <a:r>
+              <a:rPr lang="en-US" dirty="0">
+                <a:latin typeface="Arial" panose="020B0604020202020204" pitchFamily="34" charset="0"/>
+                <a:cs typeface="Arial" panose="020B0604020202020204" pitchFamily="34" charset="0"/>
+              </a:rPr>
+              <a:t> </a:t>
+            </a:r>
+            <a:r>
+              <a:rPr lang="en-US" dirty="0" err="1">
+                <a:latin typeface="Arial" panose="020B0604020202020204" pitchFamily="34" charset="0"/>
+                <a:cs typeface="Arial" panose="020B0604020202020204" pitchFamily="34" charset="0"/>
+              </a:rPr>
+              <a:t>lý</a:t>
+            </a:r>
+            <a:r>
+              <a:rPr lang="en-US" dirty="0">
+                <a:latin typeface="Arial" panose="020B0604020202020204" pitchFamily="34" charset="0"/>
+                <a:cs typeface="Arial" panose="020B0604020202020204" pitchFamily="34" charset="0"/>
+              </a:rPr>
+              <a:t> </a:t>
+            </a:r>
+            <a:r>
+              <a:rPr lang="en-US" dirty="0" err="1">
+                <a:latin typeface="Arial" panose="020B0604020202020204" pitchFamily="34" charset="0"/>
+                <a:cs typeface="Arial" panose="020B0604020202020204" pitchFamily="34" charset="0"/>
+              </a:rPr>
+              <a:t>thông</a:t>
+            </a:r>
+            <a:r>
+              <a:rPr lang="en-US" dirty="0">
+                <a:latin typeface="Arial" panose="020B0604020202020204" pitchFamily="34" charset="0"/>
+                <a:cs typeface="Arial" panose="020B0604020202020204" pitchFamily="34" charset="0"/>
+              </a:rPr>
+              <a:t> tin </a:t>
+            </a:r>
+            <a:r>
+              <a:rPr lang="en-US" dirty="0" err="1">
+                <a:latin typeface="Arial" panose="020B0604020202020204" pitchFamily="34" charset="0"/>
+                <a:cs typeface="Arial" panose="020B0604020202020204" pitchFamily="34" charset="0"/>
+              </a:rPr>
+              <a:t>nhân</a:t>
+            </a:r>
+            <a:r>
+              <a:rPr lang="en-US" dirty="0">
+                <a:latin typeface="Arial" panose="020B0604020202020204" pitchFamily="34" charset="0"/>
+                <a:cs typeface="Arial" panose="020B0604020202020204" pitchFamily="34" charset="0"/>
+              </a:rPr>
+              <a:t> </a:t>
+            </a:r>
+            <a:r>
+              <a:rPr lang="en-US" dirty="0" err="1">
+                <a:latin typeface="Arial" panose="020B0604020202020204" pitchFamily="34" charset="0"/>
+                <a:cs typeface="Arial" panose="020B0604020202020204" pitchFamily="34" charset="0"/>
+              </a:rPr>
+              <a:t>viên</a:t>
+            </a:r>
+            <a:r>
+              <a:rPr lang="en-US" dirty="0">
+                <a:latin typeface="Arial" panose="020B0604020202020204" pitchFamily="34" charset="0"/>
+                <a:cs typeface="Arial" panose="020B0604020202020204" pitchFamily="34" charset="0"/>
+              </a:rPr>
+              <a:t>, </a:t>
+            </a:r>
+            <a:r>
+              <a:rPr lang="en-US" dirty="0" err="1">
+                <a:latin typeface="Arial" panose="020B0604020202020204" pitchFamily="34" charset="0"/>
+                <a:cs typeface="Arial" panose="020B0604020202020204" pitchFamily="34" charset="0"/>
+              </a:rPr>
+              <a:t>khách</a:t>
+            </a:r>
+            <a:r>
+              <a:rPr lang="en-US" dirty="0">
+                <a:latin typeface="Arial" panose="020B0604020202020204" pitchFamily="34" charset="0"/>
+                <a:cs typeface="Arial" panose="020B0604020202020204" pitchFamily="34" charset="0"/>
+              </a:rPr>
+              <a:t> </a:t>
+            </a:r>
+            <a:r>
+              <a:rPr lang="en-US" dirty="0" err="1">
+                <a:latin typeface="Arial" panose="020B0604020202020204" pitchFamily="34" charset="0"/>
+                <a:cs typeface="Arial" panose="020B0604020202020204" pitchFamily="34" charset="0"/>
+              </a:rPr>
+              <a:t>hàng</a:t>
+            </a:r>
+            <a:r>
+              <a:rPr lang="en-US" dirty="0">
+                <a:latin typeface="Arial" panose="020B0604020202020204" pitchFamily="34" charset="0"/>
+                <a:cs typeface="Arial" panose="020B0604020202020204" pitchFamily="34" charset="0"/>
+              </a:rPr>
+              <a:t>, </a:t>
+            </a:r>
+            <a:r>
+              <a:rPr lang="en-US" dirty="0" err="1">
+                <a:latin typeface="Arial" panose="020B0604020202020204" pitchFamily="34" charset="0"/>
+                <a:cs typeface="Arial" panose="020B0604020202020204" pitchFamily="34" charset="0"/>
+              </a:rPr>
+              <a:t>tài</a:t>
+            </a:r>
+            <a:r>
+              <a:rPr lang="en-US" dirty="0">
+                <a:latin typeface="Arial" panose="020B0604020202020204" pitchFamily="34" charset="0"/>
+                <a:cs typeface="Arial" panose="020B0604020202020204" pitchFamily="34" charset="0"/>
+              </a:rPr>
+              <a:t> </a:t>
+            </a:r>
+            <a:r>
+              <a:rPr lang="en-US" dirty="0" err="1">
+                <a:latin typeface="Arial" panose="020B0604020202020204" pitchFamily="34" charset="0"/>
+                <a:cs typeface="Arial" panose="020B0604020202020204" pitchFamily="34" charset="0"/>
+              </a:rPr>
+              <a:t>khoản</a:t>
+            </a:r>
+            <a:r>
+              <a:rPr lang="en-US" dirty="0">
+                <a:latin typeface="Arial" panose="020B0604020202020204" pitchFamily="34" charset="0"/>
+                <a:cs typeface="Arial" panose="020B0604020202020204" pitchFamily="34" charset="0"/>
+              </a:rPr>
+              <a:t> </a:t>
+            </a:r>
+            <a:r>
+              <a:rPr lang="en-US" dirty="0" err="1">
+                <a:latin typeface="Arial" panose="020B0604020202020204" pitchFamily="34" charset="0"/>
+                <a:cs typeface="Arial" panose="020B0604020202020204" pitchFamily="34" charset="0"/>
+              </a:rPr>
+              <a:t>khách</a:t>
+            </a:r>
+            <a:r>
+              <a:rPr lang="en-US" dirty="0">
+                <a:latin typeface="Arial" panose="020B0604020202020204" pitchFamily="34" charset="0"/>
+                <a:cs typeface="Arial" panose="020B0604020202020204" pitchFamily="34" charset="0"/>
+              </a:rPr>
+              <a:t> </a:t>
+            </a:r>
+            <a:r>
+              <a:rPr lang="en-US" dirty="0" err="1">
+                <a:latin typeface="Arial" panose="020B0604020202020204" pitchFamily="34" charset="0"/>
+                <a:cs typeface="Arial" panose="020B0604020202020204" pitchFamily="34" charset="0"/>
+              </a:rPr>
+              <a:t>hàng</a:t>
+            </a:r>
+            <a:r>
+              <a:rPr lang="en-US" dirty="0">
+                <a:latin typeface="Arial" panose="020B0604020202020204" pitchFamily="34" charset="0"/>
+                <a:cs typeface="Arial" panose="020B0604020202020204" pitchFamily="34" charset="0"/>
+              </a:rPr>
+              <a:t>, </a:t>
+            </a:r>
+            <a:r>
+              <a:rPr lang="en-US" dirty="0" err="1">
+                <a:latin typeface="Arial" panose="020B0604020202020204" pitchFamily="34" charset="0"/>
+                <a:cs typeface="Arial" panose="020B0604020202020204" pitchFamily="34" charset="0"/>
+              </a:rPr>
+              <a:t>và</a:t>
+            </a:r>
+            <a:r>
+              <a:rPr lang="en-US" dirty="0">
+                <a:latin typeface="Arial" panose="020B0604020202020204" pitchFamily="34" charset="0"/>
+                <a:cs typeface="Arial" panose="020B0604020202020204" pitchFamily="34" charset="0"/>
+              </a:rPr>
+              <a:t> </a:t>
+            </a:r>
+            <a:r>
+              <a:rPr lang="en-US" dirty="0" err="1">
+                <a:latin typeface="Arial" panose="020B0604020202020204" pitchFamily="34" charset="0"/>
+                <a:cs typeface="Arial" panose="020B0604020202020204" pitchFamily="34" charset="0"/>
+              </a:rPr>
+              <a:t>các</a:t>
+            </a:r>
+            <a:r>
+              <a:rPr lang="en-US" dirty="0">
+                <a:latin typeface="Arial" panose="020B0604020202020204" pitchFamily="34" charset="0"/>
+                <a:cs typeface="Arial" panose="020B0604020202020204" pitchFamily="34" charset="0"/>
+              </a:rPr>
+              <a:t> </a:t>
+            </a:r>
+            <a:r>
+              <a:rPr lang="en-US" dirty="0" err="1">
+                <a:latin typeface="Arial" panose="020B0604020202020204" pitchFamily="34" charset="0"/>
+                <a:cs typeface="Arial" panose="020B0604020202020204" pitchFamily="34" charset="0"/>
+              </a:rPr>
+              <a:t>giao</a:t>
+            </a:r>
+            <a:r>
+              <a:rPr lang="en-US" dirty="0">
+                <a:latin typeface="Arial" panose="020B0604020202020204" pitchFamily="34" charset="0"/>
+                <a:cs typeface="Arial" panose="020B0604020202020204" pitchFamily="34" charset="0"/>
+              </a:rPr>
+              <a:t> </a:t>
+            </a:r>
+            <a:r>
+              <a:rPr lang="en-US" dirty="0" err="1">
+                <a:latin typeface="Arial" panose="020B0604020202020204" pitchFamily="34" charset="0"/>
+                <a:cs typeface="Arial" panose="020B0604020202020204" pitchFamily="34" charset="0"/>
+              </a:rPr>
+              <a:t>dịch</a:t>
+            </a:r>
+            <a:r>
+              <a:rPr lang="en-US" dirty="0">
+                <a:latin typeface="Arial" panose="020B0604020202020204" pitchFamily="34" charset="0"/>
+                <a:cs typeface="Arial" panose="020B0604020202020204" pitchFamily="34" charset="0"/>
+              </a:rPr>
+              <a:t> </a:t>
+            </a:r>
+            <a:r>
+              <a:rPr lang="en-US" dirty="0" err="1">
+                <a:latin typeface="Arial" panose="020B0604020202020204" pitchFamily="34" charset="0"/>
+                <a:cs typeface="Arial" panose="020B0604020202020204" pitchFamily="34" charset="0"/>
+              </a:rPr>
+              <a:t>tài</a:t>
+            </a:r>
+            <a:r>
+              <a:rPr lang="en-US" dirty="0">
+                <a:latin typeface="Arial" panose="020B0604020202020204" pitchFamily="34" charset="0"/>
+                <a:cs typeface="Arial" panose="020B0604020202020204" pitchFamily="34" charset="0"/>
+              </a:rPr>
+              <a:t> </a:t>
+            </a:r>
+            <a:r>
+              <a:rPr lang="en-US" dirty="0" err="1">
+                <a:latin typeface="Arial" panose="020B0604020202020204" pitchFamily="34" charset="0"/>
+                <a:cs typeface="Arial" panose="020B0604020202020204" pitchFamily="34" charset="0"/>
+              </a:rPr>
+              <a:t>chính</a:t>
+            </a:r>
+            <a:r>
+              <a:rPr lang="en-US" dirty="0">
+                <a:latin typeface="Arial" panose="020B0604020202020204" pitchFamily="34" charset="0"/>
+                <a:cs typeface="Arial" panose="020B0604020202020204" pitchFamily="34" charset="0"/>
+              </a:rPr>
+              <a:t> </a:t>
+            </a:r>
+            <a:r>
+              <a:rPr lang="en-US" dirty="0" err="1">
+                <a:latin typeface="Arial" panose="020B0604020202020204" pitchFamily="34" charset="0"/>
+                <a:cs typeface="Arial" panose="020B0604020202020204" pitchFamily="34" charset="0"/>
+              </a:rPr>
+              <a:t>một</a:t>
+            </a:r>
+            <a:r>
+              <a:rPr lang="en-US" dirty="0">
+                <a:latin typeface="Arial" panose="020B0604020202020204" pitchFamily="34" charset="0"/>
+                <a:cs typeface="Arial" panose="020B0604020202020204" pitchFamily="34" charset="0"/>
+              </a:rPr>
+              <a:t> </a:t>
+            </a:r>
+            <a:r>
+              <a:rPr lang="en-US" dirty="0" err="1">
+                <a:latin typeface="Arial" panose="020B0604020202020204" pitchFamily="34" charset="0"/>
+                <a:cs typeface="Arial" panose="020B0604020202020204" pitchFamily="34" charset="0"/>
+              </a:rPr>
+              <a:t>cách</a:t>
+            </a:r>
+            <a:r>
+              <a:rPr lang="en-US" dirty="0">
+                <a:latin typeface="Arial" panose="020B0604020202020204" pitchFamily="34" charset="0"/>
+                <a:cs typeface="Arial" panose="020B0604020202020204" pitchFamily="34" charset="0"/>
+              </a:rPr>
+              <a:t> </a:t>
+            </a:r>
+            <a:r>
+              <a:rPr lang="en-US" dirty="0" err="1">
+                <a:latin typeface="Arial" panose="020B0604020202020204" pitchFamily="34" charset="0"/>
+                <a:cs typeface="Arial" panose="020B0604020202020204" pitchFamily="34" charset="0"/>
+              </a:rPr>
+              <a:t>thuận</a:t>
+            </a:r>
+            <a:r>
+              <a:rPr lang="en-US" dirty="0">
+                <a:latin typeface="Arial" panose="020B0604020202020204" pitchFamily="34" charset="0"/>
+                <a:cs typeface="Arial" panose="020B0604020202020204" pitchFamily="34" charset="0"/>
+              </a:rPr>
+              <a:t> </a:t>
+            </a:r>
+            <a:r>
+              <a:rPr lang="en-US" dirty="0" err="1">
+                <a:latin typeface="Arial" panose="020B0604020202020204" pitchFamily="34" charset="0"/>
+                <a:cs typeface="Arial" panose="020B0604020202020204" pitchFamily="34" charset="0"/>
+              </a:rPr>
+              <a:t>tiện</a:t>
+            </a:r>
+            <a:r>
+              <a:rPr lang="en-US" dirty="0">
+                <a:latin typeface="Arial" panose="020B0604020202020204" pitchFamily="34" charset="0"/>
+                <a:cs typeface="Arial" panose="020B0604020202020204" pitchFamily="34" charset="0"/>
+              </a:rPr>
+              <a:t>. </a:t>
+            </a:r>
+          </a:p>
+          <a:p>
+            <a:r>
+              <a:rPr lang="en-US" dirty="0">
+                <a:latin typeface="Arial" panose="020B0604020202020204" pitchFamily="34" charset="0"/>
+                <a:cs typeface="Arial" panose="020B0604020202020204" pitchFamily="34" charset="0"/>
+              </a:rPr>
+              <a:t>K</a:t>
+            </a:r>
+            <a:r>
+              <a:rPr lang="vi-VN" dirty="0">
+                <a:latin typeface="Arial" panose="020B0604020202020204" pitchFamily="34" charset="0"/>
+                <a:cs typeface="Arial" panose="020B0604020202020204" pitchFamily="34" charset="0"/>
+              </a:rPr>
+              <a:t>ết hợp giữa ngôn ngữ lập trình Python, framework đồ họa PyQt5, và hệ thống quản lý cơ sở dữ liệu MySQL</a:t>
+            </a:r>
+            <a:endParaRPr lang="en-US" dirty="0">
+              <a:latin typeface="Arial" panose="020B0604020202020204" pitchFamily="34" charset="0"/>
+              <a:cs typeface="Arial" panose="020B0604020202020204" pitchFamily="34" charset="0"/>
+            </a:endParaRPr>
           </a:p>
         </p:txBody>
       </p:sp>
@@ -4203,7 +6767,7 @@
           <p:cNvPr id="2" name="Title 1">
             <a:extLst>
               <a:ext uri="{FF2B5EF4-FFF2-40B4-BE49-F238E27FC236}">
-                <a16:creationId xmlns:a16="http://schemas.microsoft.com/office/drawing/2014/main" id="{BF9627F3-3CD5-440C-AB2A-D214803D0A55}"/>
+                <a16:creationId xmlns:a16="http://schemas.microsoft.com/office/drawing/2014/main" id="{B07D22E0-E809-3C8D-7CDE-F29863B83ABF}"/>
               </a:ext>
             </a:extLst>
           </p:cNvPr>
@@ -4214,76 +6778,88 @@
             <p:ph type="title"/>
           </p:nvPr>
         </p:nvSpPr>
-        <p:spPr/>
+        <p:spPr>
+          <a:xfrm>
+            <a:off x="838200" y="365126"/>
+            <a:ext cx="10515600" cy="824578"/>
+          </a:xfrm>
+        </p:spPr>
         <p:txBody>
           <a:bodyPr/>
           <a:lstStyle/>
           <a:p>
             <a:r>
-              <a:rPr lang="en-US"/>
-              <a:t>2. Nội dung #2</a:t>
-            </a:r>
-          </a:p>
-        </p:txBody>
-      </p:sp>
-      <p:sp>
-        <p:nvSpPr>
-          <p:cNvPr id="3" name="Content Placeholder 2">
-            <a:extLst>
-              <a:ext uri="{FF2B5EF4-FFF2-40B4-BE49-F238E27FC236}">
-                <a16:creationId xmlns:a16="http://schemas.microsoft.com/office/drawing/2014/main" id="{567648B8-2155-468C-B7F8-D51EB73EAF45}"/>
-              </a:ext>
-            </a:extLst>
-          </p:cNvPr>
-          <p:cNvSpPr>
-            <a:spLocks noGrp="1"/>
-          </p:cNvSpPr>
+              <a:rPr lang="en-US" dirty="0"/>
+              <a:t>2. </a:t>
+            </a:r>
+            <a:r>
+              <a:rPr lang="en-US" dirty="0" err="1"/>
+              <a:t>Cơ</a:t>
+            </a:r>
+            <a:r>
+              <a:rPr lang="en-US" dirty="0"/>
+              <a:t> </a:t>
+            </a:r>
+            <a:r>
+              <a:rPr lang="en-US" dirty="0" err="1"/>
+              <a:t>sở</a:t>
+            </a:r>
+            <a:r>
+              <a:rPr lang="en-US" dirty="0"/>
+              <a:t> </a:t>
+            </a:r>
+            <a:r>
+              <a:rPr lang="en-US" dirty="0" err="1"/>
+              <a:t>dữ</a:t>
+            </a:r>
+            <a:r>
+              <a:rPr lang="en-US" dirty="0"/>
+              <a:t> </a:t>
+            </a:r>
+            <a:r>
+              <a:rPr lang="en-US" dirty="0" err="1"/>
+              <a:t>liệu</a:t>
+            </a:r>
+            <a:endParaRPr lang="en-US" dirty="0"/>
+          </a:p>
+        </p:txBody>
+      </p:sp>
+      <p:pic>
+        <p:nvPicPr>
+          <p:cNvPr id="4" name="Content Placeholder 3">
+            <a:extLst>
+              <a:ext uri="{FF2B5EF4-FFF2-40B4-BE49-F238E27FC236}">
+                <a16:creationId xmlns:a16="http://schemas.microsoft.com/office/drawing/2014/main" id="{6FAD9B20-E48C-E91F-3E89-48EC0E86D2A6}"/>
+              </a:ext>
+            </a:extLst>
+          </p:cNvPr>
+          <p:cNvPicPr>
+            <a:picLocks noGrp="1" noChangeAspect="1"/>
+          </p:cNvPicPr>
           <p:nvPr>
             <p:ph idx="1"/>
           </p:nvPr>
-        </p:nvSpPr>
-        <p:spPr/>
-        <p:txBody>
-          <a:bodyPr/>
-          <a:lstStyle/>
-          <a:p>
-            <a:r>
-              <a:rPr lang="en-US"/>
-              <a:t>Ko quá 10 sildes</a:t>
-            </a:r>
-          </a:p>
-          <a:p>
-            <a:r>
-              <a:rPr lang="en-US"/>
-              <a:t>Cơ sở dữ liệu</a:t>
-            </a:r>
-          </a:p>
-          <a:p>
-            <a:r>
-              <a:rPr lang="en-US"/>
-              <a:t>Kiến trúc hệ thống</a:t>
-            </a:r>
-          </a:p>
-          <a:p>
-            <a:r>
-              <a:rPr lang="en-US"/>
-              <a:t>Giới thiệu các chức năng hài lòn</a:t>
-            </a:r>
-            <a:r>
-              <a:rPr lang="en-US" u="sng"/>
-              <a:t>g</a:t>
-            </a:r>
-            <a:r>
-              <a:rPr lang="en-US"/>
-              <a:t> nhất đã xây dựng</a:t>
-            </a:r>
-          </a:p>
-        </p:txBody>
-      </p:sp>
+        </p:nvPicPr>
+        <p:blipFill>
+          <a:blip r:embed="rId2"/>
+          <a:stretch>
+            <a:fillRect/>
+          </a:stretch>
+        </p:blipFill>
+        <p:spPr>
+          <a:xfrm>
+            <a:off x="1877961" y="1356852"/>
+            <a:ext cx="8596075" cy="4971211"/>
+          </a:xfrm>
+          <a:prstGeom prst="rect">
+            <a:avLst/>
+          </a:prstGeom>
+        </p:spPr>
+      </p:pic>
     </p:spTree>
     <p:extLst>
       <p:ext uri="{BB962C8B-B14F-4D97-AF65-F5344CB8AC3E}">
-        <p14:creationId xmlns:p14="http://schemas.microsoft.com/office/powerpoint/2010/main" val="2336320286"/>
+        <p14:creationId xmlns:p14="http://schemas.microsoft.com/office/powerpoint/2010/main" val="2226377191"/>
       </p:ext>
     </p:extLst>
   </p:cSld>
@@ -4315,7 +6891,7 @@
           <p:cNvPr id="2" name="Title 1">
             <a:extLst>
               <a:ext uri="{FF2B5EF4-FFF2-40B4-BE49-F238E27FC236}">
-                <a16:creationId xmlns:a16="http://schemas.microsoft.com/office/drawing/2014/main" id="{82A16F7C-5726-4E4B-AC89-372198712DD1}"/>
+                <a16:creationId xmlns:a16="http://schemas.microsoft.com/office/drawing/2014/main" id="{B4A8B520-689D-7681-F922-656312A311CF}"/>
               </a:ext>
             </a:extLst>
           </p:cNvPr>
@@ -4332,80 +6908,115 @@
           <a:lstStyle/>
           <a:p>
             <a:r>
-              <a:rPr lang="en-US"/>
-              <a:t>3. Kết quả</a:t>
-            </a:r>
-          </a:p>
-        </p:txBody>
-      </p:sp>
-      <p:sp>
-        <p:nvSpPr>
-          <p:cNvPr id="3" name="Content Placeholder 2">
-            <a:extLst>
-              <a:ext uri="{FF2B5EF4-FFF2-40B4-BE49-F238E27FC236}">
-                <a16:creationId xmlns:a16="http://schemas.microsoft.com/office/drawing/2014/main" id="{07BCFCFE-AF90-4383-A48A-381AEDAC8005}"/>
-              </a:ext>
-            </a:extLst>
-          </p:cNvPr>
-          <p:cNvSpPr>
-            <a:spLocks noGrp="1"/>
-          </p:cNvSpPr>
+              <a:rPr lang="en-US" dirty="0"/>
+              <a:t>Chi </a:t>
+            </a:r>
+            <a:r>
+              <a:rPr lang="en-US" dirty="0" err="1"/>
+              <a:t>tiết</a:t>
+            </a:r>
+            <a:r>
+              <a:rPr lang="en-US" dirty="0"/>
+              <a:t> </a:t>
+            </a:r>
+            <a:r>
+              <a:rPr lang="en-US" dirty="0" err="1"/>
+              <a:t>cơ</a:t>
+            </a:r>
+            <a:r>
+              <a:rPr lang="en-US" dirty="0"/>
+              <a:t> </a:t>
+            </a:r>
+            <a:r>
+              <a:rPr lang="en-US" dirty="0" err="1"/>
+              <a:t>sở</a:t>
+            </a:r>
+            <a:r>
+              <a:rPr lang="en-US" dirty="0"/>
+              <a:t> </a:t>
+            </a:r>
+            <a:r>
+              <a:rPr lang="en-US" dirty="0" err="1"/>
+              <a:t>dữ</a:t>
+            </a:r>
+            <a:r>
+              <a:rPr lang="en-US" dirty="0"/>
+              <a:t> </a:t>
+            </a:r>
+            <a:r>
+              <a:rPr lang="en-US" dirty="0" err="1"/>
+              <a:t>liệu</a:t>
+            </a:r>
+            <a:endParaRPr lang="en-US" dirty="0"/>
+          </a:p>
+        </p:txBody>
+      </p:sp>
+      <p:pic>
+        <p:nvPicPr>
+          <p:cNvPr id="4" name="Content Placeholder 3">
+            <a:extLst>
+              <a:ext uri="{FF2B5EF4-FFF2-40B4-BE49-F238E27FC236}">
+                <a16:creationId xmlns:a16="http://schemas.microsoft.com/office/drawing/2014/main" id="{5BE69725-5398-0E19-414B-1DEFC21DFF7A}"/>
+              </a:ext>
+            </a:extLst>
+          </p:cNvPr>
+          <p:cNvPicPr>
+            <a:picLocks noGrp="1" noChangeAspect="1"/>
+          </p:cNvPicPr>
           <p:nvPr>
             <p:ph idx="1"/>
           </p:nvPr>
-        </p:nvSpPr>
-        <p:spPr/>
-        <p:txBody>
-          <a:bodyPr/>
-          <a:lstStyle/>
-          <a:p>
-            <a:r>
-              <a:rPr lang="en-US"/>
-              <a:t>1-2 slide</a:t>
-            </a:r>
-          </a:p>
-          <a:p>
-            <a:r>
-              <a:rPr lang="en-US"/>
-              <a:t>Tóm tắt kết quả đạt đ</a:t>
-            </a:r>
-            <a:r>
-              <a:rPr lang="vi-VN"/>
-              <a:t>ư</a:t>
-            </a:r>
-            <a:r>
-              <a:rPr lang="en-US"/>
-              <a:t>ợc</a:t>
-            </a:r>
-          </a:p>
-          <a:p>
-            <a:r>
-              <a:rPr lang="en-US"/>
-              <a:t>Hạn chế nếu có (ch</a:t>
-            </a:r>
-            <a:r>
-              <a:rPr lang="vi-VN"/>
-              <a:t>ư</a:t>
-            </a:r>
-            <a:r>
-              <a:rPr lang="en-US"/>
-              <a:t>a làm đ</a:t>
-            </a:r>
-            <a:r>
-              <a:rPr lang="vi-VN"/>
-              <a:t>ư</a:t>
-            </a:r>
-            <a:r>
-              <a:rPr lang="en-US"/>
-              <a:t>ợc)</a:t>
-            </a:r>
-          </a:p>
-        </p:txBody>
-      </p:sp>
+        </p:nvPicPr>
+        <p:blipFill>
+          <a:blip r:embed="rId2"/>
+          <a:stretch>
+            <a:fillRect/>
+          </a:stretch>
+        </p:blipFill>
+        <p:spPr>
+          <a:xfrm>
+            <a:off x="1020846" y="1468877"/>
+            <a:ext cx="5485161" cy="2571678"/>
+          </a:xfrm>
+          <a:prstGeom prst="rect">
+            <a:avLst/>
+          </a:prstGeom>
+        </p:spPr>
+      </p:pic>
+      <p:pic>
+        <p:nvPicPr>
+          <p:cNvPr id="5" name="Picture 4">
+            <a:extLst>
+              <a:ext uri="{FF2B5EF4-FFF2-40B4-BE49-F238E27FC236}">
+                <a16:creationId xmlns:a16="http://schemas.microsoft.com/office/drawing/2014/main" id="{1467C30C-48D0-EC96-D940-961B915CCF21}"/>
+              </a:ext>
+            </a:extLst>
+          </p:cNvPr>
+          <p:cNvPicPr>
+            <a:picLocks noChangeAspect="1"/>
+          </p:cNvPicPr>
+          <p:nvPr/>
+        </p:nvPicPr>
+        <p:blipFill>
+          <a:blip r:embed="rId3"/>
+          <a:stretch>
+            <a:fillRect/>
+          </a:stretch>
+        </p:blipFill>
+        <p:spPr>
+          <a:xfrm>
+            <a:off x="4996615" y="4020156"/>
+            <a:ext cx="6471486" cy="2389591"/>
+          </a:xfrm>
+          <a:prstGeom prst="rect">
+            <a:avLst/>
+          </a:prstGeom>
+        </p:spPr>
+      </p:pic>
     </p:spTree>
     <p:extLst>
       <p:ext uri="{BB962C8B-B14F-4D97-AF65-F5344CB8AC3E}">
-        <p14:creationId xmlns:p14="http://schemas.microsoft.com/office/powerpoint/2010/main" val="4178893437"/>
+        <p14:creationId xmlns:p14="http://schemas.microsoft.com/office/powerpoint/2010/main" val="183364119"/>
       </p:ext>
     </p:extLst>
   </p:cSld>
@@ -4437,7 +7048,7 @@
           <p:cNvPr id="2" name="Title 1">
             <a:extLst>
               <a:ext uri="{FF2B5EF4-FFF2-40B4-BE49-F238E27FC236}">
-                <a16:creationId xmlns:a16="http://schemas.microsoft.com/office/drawing/2014/main" id="{B6048E9D-0887-4B07-BAC6-87574596869A}"/>
+                <a16:creationId xmlns:a16="http://schemas.microsoft.com/office/drawing/2014/main" id="{7CC5CC32-9400-D5CF-E3F1-FACA3ADFB141}"/>
               </a:ext>
             </a:extLst>
           </p:cNvPr>
@@ -4453,56 +7064,86 @@
           <a:bodyPr/>
           <a:lstStyle/>
           <a:p>
-            <a:endParaRPr lang="en-US"/>
-          </a:p>
-        </p:txBody>
-      </p:sp>
-      <p:sp>
-        <p:nvSpPr>
-          <p:cNvPr id="3" name="Content Placeholder 2">
-            <a:extLst>
-              <a:ext uri="{FF2B5EF4-FFF2-40B4-BE49-F238E27FC236}">
-                <a16:creationId xmlns:a16="http://schemas.microsoft.com/office/drawing/2014/main" id="{4845CA07-8962-4F04-A821-483FE1179FAB}"/>
-              </a:ext>
-            </a:extLst>
-          </p:cNvPr>
-          <p:cNvSpPr>
-            <a:spLocks noGrp="1"/>
-          </p:cNvSpPr>
+            <a:r>
+              <a:rPr lang="en-US" dirty="0"/>
+              <a:t>Chi </a:t>
+            </a:r>
+            <a:r>
+              <a:rPr lang="en-US" dirty="0" err="1"/>
+              <a:t>tiết</a:t>
+            </a:r>
+            <a:r>
+              <a:rPr lang="en-US" dirty="0"/>
+              <a:t> </a:t>
+            </a:r>
+            <a:r>
+              <a:rPr lang="en-US" dirty="0" err="1"/>
+              <a:t>cơ</a:t>
+            </a:r>
+            <a:r>
+              <a:rPr lang="en-US" dirty="0"/>
+              <a:t> </a:t>
+            </a:r>
+            <a:r>
+              <a:rPr lang="en-US" dirty="0" err="1"/>
+              <a:t>sở</a:t>
+            </a:r>
+            <a:r>
+              <a:rPr lang="en-US" dirty="0"/>
+              <a:t> </a:t>
+            </a:r>
+            <a:r>
+              <a:rPr lang="en-US" dirty="0" err="1"/>
+              <a:t>dữ</a:t>
+            </a:r>
+            <a:r>
+              <a:rPr lang="en-US" dirty="0"/>
+              <a:t> </a:t>
+            </a:r>
+            <a:r>
+              <a:rPr lang="en-US" dirty="0" err="1"/>
+              <a:t>liệu</a:t>
+            </a:r>
+            <a:endParaRPr lang="en-US" dirty="0"/>
+          </a:p>
+        </p:txBody>
+      </p:sp>
+      <p:pic>
+        <p:nvPicPr>
+          <p:cNvPr id="4" name="Content Placeholder 3">
+            <a:extLst>
+              <a:ext uri="{FF2B5EF4-FFF2-40B4-BE49-F238E27FC236}">
+                <a16:creationId xmlns:a16="http://schemas.microsoft.com/office/drawing/2014/main" id="{E0909F5F-3FC3-C506-DE98-FBC30EDD2FE7}"/>
+              </a:ext>
+            </a:extLst>
+          </p:cNvPr>
+          <p:cNvPicPr>
+            <a:picLocks noGrp="1" noChangeAspect="1"/>
+          </p:cNvPicPr>
           <p:nvPr>
             <p:ph idx="1"/>
           </p:nvPr>
-        </p:nvSpPr>
-        <p:spPr/>
-        <p:txBody>
-          <a:bodyPr anchor="ctr">
-            <a:normAutofit/>
-          </a:bodyPr>
-          <a:lstStyle/>
-          <a:p>
-            <a:pPr marL="0" indent="0" algn="ctr">
-              <a:buNone/>
-            </a:pPr>
-            <a:r>
-              <a:rPr lang="en-US" sz="4500"/>
-              <a:t>THUYẾT TRÌNH: 8 phút</a:t>
-            </a:r>
-          </a:p>
-          <a:p>
-            <a:pPr marL="0" indent="0" algn="ctr">
-              <a:buNone/>
-            </a:pPr>
-            <a:r>
-              <a:rPr lang="en-US" sz="4500"/>
-              <a:t>DEMO: 8 phút</a:t>
-            </a:r>
-          </a:p>
-        </p:txBody>
-      </p:sp>
+        </p:nvPicPr>
+        <p:blipFill>
+          <a:blip r:embed="rId2"/>
+          <a:stretch>
+            <a:fillRect/>
+          </a:stretch>
+        </p:blipFill>
+        <p:spPr>
+          <a:xfrm>
+            <a:off x="1146091" y="2296391"/>
+            <a:ext cx="10327205" cy="2627096"/>
+          </a:xfrm>
+          <a:prstGeom prst="rect">
+            <a:avLst/>
+          </a:prstGeom>
+        </p:spPr>
+      </p:pic>
     </p:spTree>
     <p:extLst>
       <p:ext uri="{BB962C8B-B14F-4D97-AF65-F5344CB8AC3E}">
-        <p14:creationId xmlns:p14="http://schemas.microsoft.com/office/powerpoint/2010/main" val="996212923"/>
+        <p14:creationId xmlns:p14="http://schemas.microsoft.com/office/powerpoint/2010/main" val="3985799078"/>
       </p:ext>
     </p:extLst>
   </p:cSld>
@@ -4534,7 +7175,7 @@
           <p:cNvPr id="2" name="Title 1">
             <a:extLst>
               <a:ext uri="{FF2B5EF4-FFF2-40B4-BE49-F238E27FC236}">
-                <a16:creationId xmlns:a16="http://schemas.microsoft.com/office/drawing/2014/main" id="{18CDBA54-9739-4AD5-BC58-14912BF8F559}"/>
+                <a16:creationId xmlns:a16="http://schemas.microsoft.com/office/drawing/2014/main" id="{4D7791CB-2B8A-7995-CDD6-D14B2190108B}"/>
               </a:ext>
             </a:extLst>
           </p:cNvPr>
@@ -4550,47 +7191,243 @@
           <a:bodyPr/>
           <a:lstStyle/>
           <a:p>
-            <a:endParaRPr lang="en-US"/>
-          </a:p>
-        </p:txBody>
-      </p:sp>
-      <p:sp>
-        <p:nvSpPr>
-          <p:cNvPr id="3" name="Content Placeholder 2">
-            <a:extLst>
-              <a:ext uri="{FF2B5EF4-FFF2-40B4-BE49-F238E27FC236}">
-                <a16:creationId xmlns:a16="http://schemas.microsoft.com/office/drawing/2014/main" id="{AAD11E2B-C9E9-491E-BCE6-BE7BD48FC22D}"/>
-              </a:ext>
-            </a:extLst>
-          </p:cNvPr>
-          <p:cNvSpPr>
-            <a:spLocks noGrp="1"/>
-          </p:cNvSpPr>
+            <a:r>
+              <a:rPr lang="en-US" dirty="0"/>
+              <a:t>Chi </a:t>
+            </a:r>
+            <a:r>
+              <a:rPr lang="en-US" dirty="0" err="1"/>
+              <a:t>tiết</a:t>
+            </a:r>
+            <a:r>
+              <a:rPr lang="en-US" dirty="0"/>
+              <a:t> </a:t>
+            </a:r>
+            <a:r>
+              <a:rPr lang="en-US" dirty="0" err="1"/>
+              <a:t>cơ</a:t>
+            </a:r>
+            <a:r>
+              <a:rPr lang="en-US" dirty="0"/>
+              <a:t> </a:t>
+            </a:r>
+            <a:r>
+              <a:rPr lang="en-US" dirty="0" err="1"/>
+              <a:t>sở</a:t>
+            </a:r>
+            <a:r>
+              <a:rPr lang="en-US" dirty="0"/>
+              <a:t> </a:t>
+            </a:r>
+            <a:r>
+              <a:rPr lang="en-US" dirty="0" err="1"/>
+              <a:t>dữ</a:t>
+            </a:r>
+            <a:r>
+              <a:rPr lang="en-US" dirty="0"/>
+              <a:t> </a:t>
+            </a:r>
+            <a:r>
+              <a:rPr lang="en-US" dirty="0" err="1"/>
+              <a:t>liệu</a:t>
+            </a:r>
+            <a:endParaRPr lang="en-US" dirty="0"/>
+          </a:p>
+        </p:txBody>
+      </p:sp>
+      <p:pic>
+        <p:nvPicPr>
+          <p:cNvPr id="4" name="Content Placeholder 3">
+            <a:extLst>
+              <a:ext uri="{FF2B5EF4-FFF2-40B4-BE49-F238E27FC236}">
+                <a16:creationId xmlns:a16="http://schemas.microsoft.com/office/drawing/2014/main" id="{AACA340D-0BAF-D77C-446C-1D108235F60C}"/>
+              </a:ext>
+            </a:extLst>
+          </p:cNvPr>
+          <p:cNvPicPr>
+            <a:picLocks noGrp="1" noChangeAspect="1"/>
+          </p:cNvPicPr>
           <p:nvPr>
             <p:ph idx="1"/>
           </p:nvPr>
-        </p:nvSpPr>
-        <p:spPr/>
-        <p:txBody>
-          <a:bodyPr anchor="ctr">
-            <a:normAutofit/>
-          </a:bodyPr>
-          <a:lstStyle/>
-          <a:p>
-            <a:pPr marL="0" indent="0" algn="ctr">
-              <a:buNone/>
-            </a:pPr>
-            <a:r>
-              <a:rPr lang="en-US" sz="6000"/>
-              <a:t>Q&amp;A</a:t>
-            </a:r>
-          </a:p>
-        </p:txBody>
-      </p:sp>
+        </p:nvPicPr>
+        <p:blipFill>
+          <a:blip r:embed="rId2"/>
+          <a:stretch>
+            <a:fillRect/>
+          </a:stretch>
+        </p:blipFill>
+        <p:spPr>
+          <a:xfrm>
+            <a:off x="474515" y="1836160"/>
+            <a:ext cx="5614555" cy="3821017"/>
+          </a:xfrm>
+          <a:prstGeom prst="rect">
+            <a:avLst/>
+          </a:prstGeom>
+        </p:spPr>
+      </p:pic>
+      <p:pic>
+        <p:nvPicPr>
+          <p:cNvPr id="5" name="Picture 4">
+            <a:extLst>
+              <a:ext uri="{FF2B5EF4-FFF2-40B4-BE49-F238E27FC236}">
+                <a16:creationId xmlns:a16="http://schemas.microsoft.com/office/drawing/2014/main" id="{06CC4CB0-9948-6F66-A2F9-B99C1C13F080}"/>
+              </a:ext>
+            </a:extLst>
+          </p:cNvPr>
+          <p:cNvPicPr>
+            <a:picLocks noChangeAspect="1"/>
+          </p:cNvPicPr>
+          <p:nvPr/>
+        </p:nvPicPr>
+        <p:blipFill>
+          <a:blip r:embed="rId3"/>
+          <a:stretch>
+            <a:fillRect/>
+          </a:stretch>
+        </p:blipFill>
+        <p:spPr>
+          <a:xfrm>
+            <a:off x="6137347" y="1888113"/>
+            <a:ext cx="5852982" cy="3369688"/>
+          </a:xfrm>
+          <a:prstGeom prst="rect">
+            <a:avLst/>
+          </a:prstGeom>
+        </p:spPr>
+      </p:pic>
     </p:spTree>
     <p:extLst>
       <p:ext uri="{BB962C8B-B14F-4D97-AF65-F5344CB8AC3E}">
-        <p14:creationId xmlns:p14="http://schemas.microsoft.com/office/powerpoint/2010/main" val="1427994108"/>
+        <p14:creationId xmlns:p14="http://schemas.microsoft.com/office/powerpoint/2010/main" val="700942124"/>
+      </p:ext>
+    </p:extLst>
+  </p:cSld>
+  <p:clrMapOvr>
+    <a:masterClrMapping/>
+  </p:clrMapOvr>
+</p:sld>
+</file>
+
+<file path=ppt/slides/slide9.xml><?xml version="1.0" encoding="utf-8"?>
+<p:sld xmlns:a="http://schemas.openxmlformats.org/drawingml/2006/main" xmlns:r="http://schemas.openxmlformats.org/officeDocument/2006/relationships" xmlns:p="http://schemas.openxmlformats.org/presentationml/2006/main">
+  <p:cSld>
+    <p:spTree>
+      <p:nvGrpSpPr>
+        <p:cNvPr id="1" name=""/>
+        <p:cNvGrpSpPr/>
+        <p:nvPr/>
+      </p:nvGrpSpPr>
+      <p:grpSpPr>
+        <a:xfrm>
+          <a:off x="0" y="0"/>
+          <a:ext cx="0" cy="0"/>
+          <a:chOff x="0" y="0"/>
+          <a:chExt cx="0" cy="0"/>
+        </a:xfrm>
+      </p:grpSpPr>
+      <p:sp>
+        <p:nvSpPr>
+          <p:cNvPr id="2" name="Title 1">
+            <a:extLst>
+              <a:ext uri="{FF2B5EF4-FFF2-40B4-BE49-F238E27FC236}">
+                <a16:creationId xmlns:a16="http://schemas.microsoft.com/office/drawing/2014/main" id="{47A67965-DD84-56BF-8411-86F2175A8252}"/>
+              </a:ext>
+            </a:extLst>
+          </p:cNvPr>
+          <p:cNvSpPr>
+            <a:spLocks noGrp="1"/>
+          </p:cNvSpPr>
+          <p:nvPr>
+            <p:ph type="title"/>
+          </p:nvPr>
+        </p:nvSpPr>
+        <p:spPr/>
+        <p:txBody>
+          <a:bodyPr/>
+          <a:lstStyle/>
+          <a:p>
+            <a:r>
+              <a:rPr lang="en-US" dirty="0"/>
+              <a:t>Chi </a:t>
+            </a:r>
+            <a:r>
+              <a:rPr lang="en-US" dirty="0" err="1"/>
+              <a:t>tiết</a:t>
+            </a:r>
+            <a:r>
+              <a:rPr lang="en-US" dirty="0"/>
+              <a:t> </a:t>
+            </a:r>
+            <a:r>
+              <a:rPr lang="en-US" dirty="0" err="1"/>
+              <a:t>cơ</a:t>
+            </a:r>
+            <a:r>
+              <a:rPr lang="en-US" dirty="0"/>
+              <a:t> </a:t>
+            </a:r>
+            <a:r>
+              <a:rPr lang="en-US" dirty="0" err="1"/>
+              <a:t>sở</a:t>
+            </a:r>
+            <a:r>
+              <a:rPr lang="en-US" dirty="0"/>
+              <a:t> </a:t>
+            </a:r>
+            <a:r>
+              <a:rPr lang="en-US" dirty="0" err="1"/>
+              <a:t>dữ</a:t>
+            </a:r>
+            <a:r>
+              <a:rPr lang="en-US" dirty="0"/>
+              <a:t> </a:t>
+            </a:r>
+            <a:r>
+              <a:rPr lang="en-US" dirty="0" err="1"/>
+              <a:t>liệu</a:t>
+            </a:r>
+            <a:endParaRPr lang="en-US" dirty="0"/>
+          </a:p>
+        </p:txBody>
+      </p:sp>
+      <p:pic>
+        <p:nvPicPr>
+          <p:cNvPr id="4" name="Content Placeholder 3">
+            <a:extLst>
+              <a:ext uri="{FF2B5EF4-FFF2-40B4-BE49-F238E27FC236}">
+                <a16:creationId xmlns:a16="http://schemas.microsoft.com/office/drawing/2014/main" id="{CF6AC5DA-431B-FC61-0D9C-FFC8CEC60835}"/>
+              </a:ext>
+            </a:extLst>
+          </p:cNvPr>
+          <p:cNvPicPr>
+            <a:picLocks noGrp="1" noChangeAspect="1"/>
+          </p:cNvPicPr>
+          <p:nvPr>
+            <p:ph idx="1"/>
+          </p:nvPr>
+        </p:nvPicPr>
+        <p:blipFill>
+          <a:blip r:embed="rId2"/>
+          <a:stretch>
+            <a:fillRect/>
+          </a:stretch>
+        </p:blipFill>
+        <p:spPr>
+          <a:xfrm>
+            <a:off x="3182722" y="2186311"/>
+            <a:ext cx="5324835" cy="2721913"/>
+          </a:xfrm>
+          <a:prstGeom prst="rect">
+            <a:avLst/>
+          </a:prstGeom>
+        </p:spPr>
+      </p:pic>
+    </p:spTree>
+    <p:extLst>
+      <p:ext uri="{BB962C8B-B14F-4D97-AF65-F5344CB8AC3E}">
+        <p14:creationId xmlns:p14="http://schemas.microsoft.com/office/powerpoint/2010/main" val="2557643121"/>
       </p:ext>
     </p:extLst>
   </p:cSld>
